--- a/examples/04_genomics_healthcare/Presentation.pptx
+++ b/examples/04_genomics_healthcare/Presentation.pptx
@@ -7,11 +7,9 @@
   <p:sldIdLst>
     <p:sldId id="256" r:id="rId2"/>
     <p:sldId id="257" r:id="rId3"/>
-    <p:sldId id="258" r:id="rId4"/>
-    <p:sldId id="259" r:id="rId5"/>
   </p:sldIdLst>
   <p:notesMasterIdLst>
-    <p:notesMasterId r:id="rId6"/>
+    <p:notesMasterId r:id="rId4"/>
   </p:notesMasterIdLst>
   <p:sldSz cx="12192000" cy="6858000"/>
   <p:notesSz cx="6858000" cy="12192000"/>
@@ -505,8 +503,8 @@
           <a:p>
             <a:r>
               <a:rPr lang="en-US" dirty="0"/>
-              <a:t>1. Hero
-note: [오프닝] 단일 세포 수준에서 암 미세환경을 분석하여 맞춤형 면역 치료제를 도출하는 플랫폼을 소개합니다.</a:t>
+              <a:t>Slide 1: Clinical Clean Hero
+note: 단일 세포 유전체 분석 기반 정밀 면역항암 플랫폼의 임상 지표입니다.</a:t>
             </a:r>
             <a:endParaRPr lang="en-US" dirty="0"/>
           </a:p>
@@ -594,8 +592,8 @@
           <a:p>
             <a:r>
               <a:rPr lang="en-US" dirty="0"/>
-              <a:t>2. Flow
-note: [파이프라인] 4단계 자동화 파이프라인으로 타겟 발굴 시간을 6분의 1로 단축했습니다.</a:t>
+              <a:t>Slide 2: Clinical Matrix Comparison Table
+note: 기존 화학요법 및 1세대 면역항암제 대비 월등한 반응률과 안전성 비교표입니다.</a:t>
             </a:r>
             <a:endParaRPr lang="en-US" dirty="0"/>
           </a:p>
@@ -619,184 +617,6 @@
             <a:fld id="{F7021451-1387-4CA6-816F-3879F97B5CBC}" type="slidenum">
               <a:rPr lang="en-US"/>
               <a:t>2</a:t>
-            </a:fld>
-            <a:endParaRPr lang="en-US"/>
-          </a:p>
-        </p:txBody>
-      </p:sp>
-    </p:spTree>
-    <p:extLst>
-      <p:ext uri="{BB962C8B-B14F-4D97-AF65-F5344CB8AC3E}">
-        <p14:creationId xmlns:p14="http://schemas.microsoft.com/office/powerpoint/2010/main" val="1024086991"/>
-      </p:ext>
-    </p:extLst>
-  </p:cSld>
-  <p:clrMapOvr>
-    <a:masterClrMapping/>
-  </p:clrMapOvr>
-</p:notes>
-</file>
-
-<file path=ppt/notesSlides/notesSlide3.xml><?xml version="1.0" encoding="utf-8"?>
-<p:notes xmlns:a="http://schemas.openxmlformats.org/drawingml/2006/main" xmlns:r="http://schemas.openxmlformats.org/officeDocument/2006/relationships" xmlns:p="http://schemas.openxmlformats.org/presentationml/2006/main">
-  <p:cSld>
-    <p:spTree>
-      <p:nvGrpSpPr>
-        <p:cNvPr id="1" name=""/>
-        <p:cNvGrpSpPr/>
-        <p:nvPr/>
-      </p:nvGrpSpPr>
-      <p:grpSpPr>
-        <a:xfrm>
-          <a:off x="0" y="0"/>
-          <a:ext cx="0" cy="0"/>
-          <a:chOff x="0" y="0"/>
-          <a:chExt cx="0" cy="0"/>
-        </a:xfrm>
-      </p:grpSpPr>
-      <p:sp>
-        <p:nvSpPr>
-          <p:cNvPr id="2" name="Slide Image Placeholder 1"/>
-          <p:cNvSpPr>
-            <a:spLocks noGrp="1" noRot="1" noChangeAspect="1"/>
-          </p:cNvSpPr>
-          <p:nvPr>
-            <p:ph type="sldImg"/>
-          </p:nvPr>
-        </p:nvSpPr>
-        <p:spPr/>
-      </p:sp>
-      <p:sp>
-        <p:nvSpPr>
-          <p:cNvPr id="3" name="Notes Placeholder 2"/>
-          <p:cNvSpPr>
-            <a:spLocks noGrp="1"/>
-          </p:cNvSpPr>
-          <p:nvPr>
-            <p:ph type="body" idx="1"/>
-          </p:nvPr>
-        </p:nvSpPr>
-        <p:spPr/>
-        <p:txBody>
-          <a:bodyPr/>
-          <a:lstStyle/>
-          <a:p>
-            <a:r>
-              <a:rPr lang="en-US" dirty="0"/>
-              <a:t>3. Big Stats
-note: [임상 지표] 84.2%의 종양 감소율과 중대 독성 0건의 안전성을 확인했습니다.</a:t>
-            </a:r>
-            <a:endParaRPr lang="en-US" dirty="0"/>
-          </a:p>
-        </p:txBody>
-      </p:sp>
-      <p:sp>
-        <p:nvSpPr>
-          <p:cNvPr id="4" name="Slide Number Placeholder 3"/>
-          <p:cNvSpPr>
-            <a:spLocks noGrp="1"/>
-          </p:cNvSpPr>
-          <p:nvPr>
-            <p:ph type="sldNum" sz="quarter" idx="10"/>
-          </p:nvPr>
-        </p:nvSpPr>
-        <p:spPr/>
-        <p:txBody>
-          <a:bodyPr/>
-          <a:lstStyle/>
-          <a:p>
-            <a:fld id="{F7021451-1387-4CA6-816F-3879F97B5CBC}" type="slidenum">
-              <a:rPr lang="en-US"/>
-              <a:t>3</a:t>
-            </a:fld>
-            <a:endParaRPr lang="en-US"/>
-          </a:p>
-        </p:txBody>
-      </p:sp>
-    </p:spTree>
-    <p:extLst>
-      <p:ext uri="{BB962C8B-B14F-4D97-AF65-F5344CB8AC3E}">
-        <p14:creationId xmlns:p14="http://schemas.microsoft.com/office/powerpoint/2010/main" val="1024086991"/>
-      </p:ext>
-    </p:extLst>
-  </p:cSld>
-  <p:clrMapOvr>
-    <a:masterClrMapping/>
-  </p:clrMapOvr>
-</p:notes>
-</file>
-
-<file path=ppt/notesSlides/notesSlide4.xml><?xml version="1.0" encoding="utf-8"?>
-<p:notes xmlns:a="http://schemas.openxmlformats.org/drawingml/2006/main" xmlns:r="http://schemas.openxmlformats.org/officeDocument/2006/relationships" xmlns:p="http://schemas.openxmlformats.org/presentationml/2006/main">
-  <p:cSld>
-    <p:spTree>
-      <p:nvGrpSpPr>
-        <p:cNvPr id="1" name=""/>
-        <p:cNvGrpSpPr/>
-        <p:nvPr/>
-      </p:nvGrpSpPr>
-      <p:grpSpPr>
-        <a:xfrm>
-          <a:off x="0" y="0"/>
-          <a:ext cx="0" cy="0"/>
-          <a:chOff x="0" y="0"/>
-          <a:chExt cx="0" cy="0"/>
-        </a:xfrm>
-      </p:grpSpPr>
-      <p:sp>
-        <p:nvSpPr>
-          <p:cNvPr id="2" name="Slide Image Placeholder 1"/>
-          <p:cNvSpPr>
-            <a:spLocks noGrp="1" noRot="1" noChangeAspect="1"/>
-          </p:cNvSpPr>
-          <p:nvPr>
-            <p:ph type="sldImg"/>
-          </p:nvPr>
-        </p:nvSpPr>
-        <p:spPr/>
-      </p:sp>
-      <p:sp>
-        <p:nvSpPr>
-          <p:cNvPr id="3" name="Notes Placeholder 2"/>
-          <p:cNvSpPr>
-            <a:spLocks noGrp="1"/>
-          </p:cNvSpPr>
-          <p:nvPr>
-            <p:ph type="body" idx="1"/>
-          </p:nvPr>
-        </p:nvSpPr>
-        <p:spPr/>
-        <p:txBody>
-          <a:bodyPr/>
-          <a:lstStyle/>
-          <a:p>
-            <a:r>
-              <a:rPr lang="en-US" dirty="0"/>
-              <a:t>4. Closing
-note: [마무리] 경청해 주셔서 감사합니다. 질문을 받겠습니다.</a:t>
-            </a:r>
-            <a:endParaRPr lang="en-US" dirty="0"/>
-          </a:p>
-        </p:txBody>
-      </p:sp>
-      <p:sp>
-        <p:nvSpPr>
-          <p:cNvPr id="4" name="Slide Number Placeholder 3"/>
-          <p:cNvSpPr>
-            <a:spLocks noGrp="1"/>
-          </p:cNvSpPr>
-          <p:nvPr>
-            <p:ph type="sldNum" sz="quarter" idx="10"/>
-          </p:nvPr>
-        </p:nvSpPr>
-        <p:spPr/>
-        <p:txBody>
-          <a:bodyPr/>
-          <a:lstStyle/>
-          <a:p>
-            <a:fld id="{F7021451-1387-4CA6-816F-3879F97B5CBC}" type="slidenum">
-              <a:rPr lang="en-US"/>
-              <a:t>4</a:t>
             </a:fld>
             <a:endParaRPr lang="en-US"/>
           </a:p>
@@ -1164,84 +984,6 @@
 <file path=ppt/slides/slide2.xml><?xml version="1.0" encoding="utf-8"?>
 <p:sld xmlns:a="http://schemas.openxmlformats.org/drawingml/2006/main" xmlns:r="http://schemas.openxmlformats.org/officeDocument/2006/relationships" xmlns:p="http://schemas.openxmlformats.org/presentationml/2006/main">
   <p:cSld name="Slide 2">
-    <p:bg>
-      <p:bgPr>
-        <a:blipFill dpi="0" rotWithShape="1">
-          <a:blip r:embed="rId1">
-            <a:lum/>
-          </a:blip>
-          <a:srcRect/>
-          <a:stretch>
-            <a:fillRect/>
-          </a:stretch>
-        </a:blipFill>
-        <a:effectLst/>
-      </p:bgPr>
-    </p:bg>
-    <p:spTree>
-      <p:nvGrpSpPr>
-        <p:cNvPr id="1" name=""/>
-        <p:cNvGrpSpPr/>
-        <p:nvPr/>
-      </p:nvGrpSpPr>
-      <p:grpSpPr>
-        <a:xfrm>
-          <a:off x="0" y="0"/>
-          <a:ext cx="0" cy="0"/>
-          <a:chOff x="0" y="0"/>
-          <a:chExt cx="0" cy="0"/>
-        </a:xfrm>
-      </p:grpSpPr>
-    </p:spTree>
-  </p:cSld>
-  <p:clrMapOvr>
-    <a:masterClrMapping/>
-  </p:clrMapOvr>
-</p:sld>
-</file>
-
-<file path=ppt/slides/slide3.xml><?xml version="1.0" encoding="utf-8"?>
-<p:sld xmlns:a="http://schemas.openxmlformats.org/drawingml/2006/main" xmlns:r="http://schemas.openxmlformats.org/officeDocument/2006/relationships" xmlns:p="http://schemas.openxmlformats.org/presentationml/2006/main">
-  <p:cSld name="Slide 3">
-    <p:bg>
-      <p:bgPr>
-        <a:blipFill dpi="0" rotWithShape="1">
-          <a:blip r:embed="rId1">
-            <a:lum/>
-          </a:blip>
-          <a:srcRect/>
-          <a:stretch>
-            <a:fillRect/>
-          </a:stretch>
-        </a:blipFill>
-        <a:effectLst/>
-      </p:bgPr>
-    </p:bg>
-    <p:spTree>
-      <p:nvGrpSpPr>
-        <p:cNvPr id="1" name=""/>
-        <p:cNvGrpSpPr/>
-        <p:nvPr/>
-      </p:nvGrpSpPr>
-      <p:grpSpPr>
-        <a:xfrm>
-          <a:off x="0" y="0"/>
-          <a:ext cx="0" cy="0"/>
-          <a:chOff x="0" y="0"/>
-          <a:chExt cx="0" cy="0"/>
-        </a:xfrm>
-      </p:grpSpPr>
-    </p:spTree>
-  </p:cSld>
-  <p:clrMapOvr>
-    <a:masterClrMapping/>
-  </p:clrMapOvr>
-</p:sld>
-</file>
-
-<file path=ppt/slides/slide4.xml><?xml version="1.0" encoding="utf-8"?>
-<p:sld xmlns:a="http://schemas.openxmlformats.org/drawingml/2006/main" xmlns:r="http://schemas.openxmlformats.org/officeDocument/2006/relationships" xmlns:p="http://schemas.openxmlformats.org/presentationml/2006/main">
-  <p:cSld name="Slide 4">
     <p:bg>
       <p:bgPr>
         <a:blipFill dpi="0" rotWithShape="1">

--- a/examples/04_genomics_healthcare/Presentation.pptx
+++ b/examples/04_genomics_healthcare/Presentation.pptx
@@ -503,8 +503,7 @@
           <a:p>
             <a:r>
               <a:rPr lang="en-US" dirty="0"/>
-              <a:t>Slide 1: Clinical Clean Hero
-note: 단일 세포 유전체 분석 기반 정밀 면역항암 플랫폼의 임상 지표입니다.</a:t>
+              <a:t>단일 세포 유전체 분석 기반 정밀 면역항암 플랫폼의 임상 지표입니다.</a:t>
             </a:r>
             <a:endParaRPr lang="en-US" dirty="0"/>
           </a:p>
@@ -592,8 +591,7 @@
           <a:p>
             <a:r>
               <a:rPr lang="en-US" dirty="0"/>
-              <a:t>Slide 2: Clinical Matrix Comparison Table
-note: 기존 화학요법 및 1세대 면역항암제 대비 월등한 반응률과 안전성 비교표입니다.</a:t>
+              <a:t>기존 화학요법 및 1세대 면역항암제 대비 월등한 반응률과 안전성 비교표입니다.</a:t>
             </a:r>
             <a:endParaRPr lang="en-US" dirty="0"/>
           </a:p>
@@ -947,16 +945,9 @@
   <p:cSld name="Slide 1">
     <p:bg>
       <p:bgPr>
-        <a:blipFill dpi="0" rotWithShape="1">
-          <a:blip r:embed="rId1">
-            <a:lum/>
-          </a:blip>
-          <a:srcRect/>
-          <a:stretch>
-            <a:fillRect/>
-          </a:stretch>
-        </a:blipFill>
-        <a:effectLst/>
+        <a:solidFill>
+          <a:srgbClr val="F8FAFC"/>
+        </a:solidFill>
       </p:bgPr>
     </p:bg>
     <p:spTree>
@@ -973,6 +964,732 @@
           <a:chExt cx="0" cy="0"/>
         </a:xfrm>
       </p:grpSpPr>
+      <p:sp>
+        <p:nvSpPr>
+          <p:cNvPr id="2" name="Shape 0"/>
+          <p:cNvSpPr/>
+          <p:nvPr/>
+        </p:nvSpPr>
+        <p:spPr>
+          <a:xfrm>
+            <a:off x="533370" y="466710"/>
+            <a:ext cx="2541300" cy="374447"/>
+          </a:xfrm>
+          <a:prstGeom prst="roundRect">
+            <a:avLst>
+              <a:gd name="adj" fmla="val 10183"/>
+            </a:avLst>
+          </a:prstGeom>
+          <a:solidFill>
+            <a:srgbClr val="E0F2FE"/>
+          </a:solidFill>
+          <a:ln/>
+        </p:spPr>
+      </p:sp>
+      <p:sp>
+        <p:nvSpPr>
+          <p:cNvPr id="3" name="Text 1"/>
+          <p:cNvSpPr txBox="1"/>
+          <p:nvPr/>
+        </p:nvSpPr>
+        <p:spPr>
+          <a:xfrm>
+            <a:off x="609630" y="503286"/>
+            <a:ext cx="2557851" cy="298369"/>
+          </a:xfrm>
+          <a:prstGeom prst="rect">
+            <a:avLst/>
+          </a:prstGeom>
+          <a:noFill/>
+          <a:ln/>
+        </p:spPr>
+        <p:txBody>
+          <a:bodyPr wrap="none" lIns="0" tIns="0" rIns="0" bIns="0" rtlCol="0" anchor="t"/>
+          <a:lstStyle/>
+          <a:p>
+            <a:pPr algn="l" indent="0" marL="0">
+              <a:lnSpc>
+                <a:spcPts val="2349"/>
+              </a:lnSpc>
+              <a:buNone/>
+            </a:pPr>
+            <a:r>
+              <a:rPr lang="en-US" sz="1566" b="1" spc="-54" kern="0" dirty="0">
+                <a:solidFill>
+                  <a:srgbClr val="0284C7"/>
+                </a:solidFill>
+                <a:latin typeface="Malgun Gothic" pitchFamily="34" charset="0"/>
+                <a:ea typeface="Malgun Gothic" pitchFamily="34" charset="-122"/>
+                <a:cs typeface="Malgun Gothic" pitchFamily="34" charset="-120"/>
+              </a:rPr>
+              <a:t>CLINICAL PROTOCOL v3.4</a:t>
+            </a:r>
+            <a:endParaRPr lang="en-US" sz="1566" dirty="0"/>
+          </a:p>
+        </p:txBody>
+      </p:sp>
+      <p:sp>
+        <p:nvSpPr>
+          <p:cNvPr id="4" name="Text 2"/>
+          <p:cNvSpPr txBox="1"/>
+          <p:nvPr/>
+        </p:nvSpPr>
+        <p:spPr>
+          <a:xfrm>
+            <a:off x="514350" y="893003"/>
+            <a:ext cx="11163270" cy="1450147"/>
+          </a:xfrm>
+          <a:prstGeom prst="rect">
+            <a:avLst/>
+          </a:prstGeom>
+          <a:noFill/>
+          <a:ln/>
+        </p:spPr>
+        <p:txBody>
+          <a:bodyPr wrap="square" lIns="0" tIns="0" rIns="0" bIns="0" rtlCol="0" anchor="t"/>
+          <a:lstStyle/>
+          <a:p>
+            <a:pPr algn="l" indent="0" marL="0">
+              <a:lnSpc>
+                <a:spcPts val="5709"/>
+              </a:lnSpc>
+              <a:buNone/>
+            </a:pPr>
+            <a:r>
+              <a:rPr lang="en-US" sz="4568" b="1" spc="-54" kern="0" dirty="0">
+                <a:solidFill>
+                  <a:srgbClr val="0F172A"/>
+                </a:solidFill>
+                <a:latin typeface="Malgun Gothic" pitchFamily="34" charset="0"/>
+                <a:ea typeface="Malgun Gothic" pitchFamily="34" charset="-122"/>
+                <a:cs typeface="Malgun Gothic" pitchFamily="34" charset="-120"/>
+              </a:rPr>
+              <a:t>단일 세포 전사체 분석 기반</a:t>
+            </a:r>
+            <a:endParaRPr lang="en-US" sz="4568" dirty="0"/>
+          </a:p>
+          <a:p>
+            <a:pPr algn="l" indent="0" marL="0">
+              <a:lnSpc>
+                <a:spcPts val="5709"/>
+              </a:lnSpc>
+              <a:buNone/>
+            </a:pPr>
+            <a:r>
+              <a:rPr lang="en-US" sz="4568" b="1" spc="-54" kern="0" dirty="0">
+                <a:solidFill>
+                  <a:srgbClr val="0284C7"/>
+                </a:solidFill>
+                <a:latin typeface="Malgun Gothic" pitchFamily="34" charset="0"/>
+                <a:ea typeface="Malgun Gothic" pitchFamily="34" charset="-122"/>
+                <a:cs typeface="Malgun Gothic" pitchFamily="34" charset="-120"/>
+              </a:rPr>
+              <a:t>정밀 면역항암 바이오마커 행렬</a:t>
+            </a:r>
+            <a:endParaRPr lang="en-US" sz="4568" dirty="0"/>
+          </a:p>
+        </p:txBody>
+      </p:sp>
+      <p:sp>
+        <p:nvSpPr>
+          <p:cNvPr id="5" name="Text 3"/>
+          <p:cNvSpPr txBox="1"/>
+          <p:nvPr/>
+        </p:nvSpPr>
+        <p:spPr>
+          <a:xfrm>
+            <a:off x="514350" y="2575865"/>
+            <a:ext cx="12034236" cy="217170"/>
+          </a:xfrm>
+          <a:prstGeom prst="rect">
+            <a:avLst/>
+          </a:prstGeom>
+          <a:noFill/>
+          <a:ln/>
+        </p:spPr>
+        <p:txBody>
+          <a:bodyPr wrap="none" lIns="0" tIns="0" rIns="0" bIns="0" rtlCol="0" anchor="t"/>
+          <a:lstStyle/>
+          <a:p>
+            <a:pPr algn="l" indent="0" marL="0">
+              <a:lnSpc>
+                <a:spcPts val="1710"/>
+              </a:lnSpc>
+              <a:buNone/>
+            </a:pPr>
+            <a:r>
+              <a:rPr lang="en-US" sz="1140" spc="-54" kern="0" dirty="0">
+                <a:solidFill>
+                  <a:srgbClr val="64748B"/>
+                </a:solidFill>
+                <a:latin typeface="Malgun Gothic" pitchFamily="34" charset="0"/>
+                <a:ea typeface="Malgun Gothic" pitchFamily="34" charset="-122"/>
+                <a:cs typeface="Malgun Gothic" pitchFamily="34" charset="-120"/>
+              </a:rPr>
+              <a:t>불응성 고형암 환자 500례 대상 10x Genomics 단일 세포 RNA 시퀀싱 임상 결과</a:t>
+            </a:r>
+            <a:endParaRPr lang="en-US" sz="1140" dirty="0"/>
+          </a:p>
+        </p:txBody>
+      </p:sp>
+      <p:sp>
+        <p:nvSpPr>
+          <p:cNvPr id="6" name="Shape 4"/>
+          <p:cNvSpPr/>
+          <p:nvPr/>
+        </p:nvSpPr>
+        <p:spPr>
+          <a:xfrm>
+            <a:off x="533370" y="5565861"/>
+            <a:ext cx="3606759" cy="873069"/>
+          </a:xfrm>
+          <a:prstGeom prst="roundRect">
+            <a:avLst>
+              <a:gd name="adj" fmla="val 8724"/>
+            </a:avLst>
+          </a:prstGeom>
+          <a:solidFill>
+            <a:srgbClr val="FFFFFF"/>
+          </a:solidFill>
+          <a:ln/>
+        </p:spPr>
+      </p:sp>
+      <p:sp>
+        <p:nvSpPr>
+          <p:cNvPr id="7" name="Shape 5"/>
+          <p:cNvSpPr/>
+          <p:nvPr/>
+        </p:nvSpPr>
+        <p:spPr>
+          <a:xfrm>
+            <a:off x="533370" y="5565861"/>
+            <a:ext cx="3606759" cy="28621"/>
+          </a:xfrm>
+          <a:prstGeom prst="rect">
+            <a:avLst/>
+          </a:prstGeom>
+          <a:solidFill>
+            <a:srgbClr val="0284C7"/>
+          </a:solidFill>
+          <a:ln/>
+        </p:spPr>
+      </p:sp>
+      <p:sp>
+        <p:nvSpPr>
+          <p:cNvPr id="8" name="Shape 6"/>
+          <p:cNvSpPr/>
+          <p:nvPr/>
+        </p:nvSpPr>
+        <p:spPr>
+          <a:xfrm>
+            <a:off x="4130619" y="5565861"/>
+            <a:ext cx="9510" cy="873069"/>
+          </a:xfrm>
+          <a:prstGeom prst="rect">
+            <a:avLst/>
+          </a:prstGeom>
+          <a:solidFill>
+            <a:srgbClr val="E2E8F0"/>
+          </a:solidFill>
+          <a:ln/>
+        </p:spPr>
+      </p:sp>
+      <p:sp>
+        <p:nvSpPr>
+          <p:cNvPr id="9" name="Shape 7"/>
+          <p:cNvSpPr/>
+          <p:nvPr/>
+        </p:nvSpPr>
+        <p:spPr>
+          <a:xfrm>
+            <a:off x="533370" y="6429421"/>
+            <a:ext cx="3606759" cy="9510"/>
+          </a:xfrm>
+          <a:prstGeom prst="rect">
+            <a:avLst/>
+          </a:prstGeom>
+          <a:solidFill>
+            <a:srgbClr val="E2E8F0"/>
+          </a:solidFill>
+          <a:ln/>
+        </p:spPr>
+      </p:sp>
+      <p:sp>
+        <p:nvSpPr>
+          <p:cNvPr id="10" name="Shape 8"/>
+          <p:cNvSpPr/>
+          <p:nvPr/>
+        </p:nvSpPr>
+        <p:spPr>
+          <a:xfrm>
+            <a:off x="533370" y="5565861"/>
+            <a:ext cx="9510" cy="873069"/>
+          </a:xfrm>
+          <a:prstGeom prst="rect">
+            <a:avLst/>
+          </a:prstGeom>
+          <a:solidFill>
+            <a:srgbClr val="E2E8F0"/>
+          </a:solidFill>
+          <a:ln/>
+        </p:spPr>
+      </p:sp>
+      <p:sp>
+        <p:nvSpPr>
+          <p:cNvPr id="11" name="Text 9"/>
+          <p:cNvSpPr txBox="1"/>
+          <p:nvPr/>
+        </p:nvSpPr>
+        <p:spPr>
+          <a:xfrm>
+            <a:off x="676290" y="5740695"/>
+            <a:ext cx="3564606" cy="164592"/>
+          </a:xfrm>
+          <a:prstGeom prst="rect">
+            <a:avLst/>
+          </a:prstGeom>
+          <a:noFill/>
+          <a:ln/>
+        </p:spPr>
+        <p:txBody>
+          <a:bodyPr wrap="none" lIns="0" tIns="0" rIns="0" bIns="0" rtlCol="0" anchor="t"/>
+          <a:lstStyle/>
+          <a:p>
+            <a:pPr algn="l" indent="0" marL="0">
+              <a:lnSpc>
+                <a:spcPts val="1296"/>
+              </a:lnSpc>
+              <a:buNone/>
+            </a:pPr>
+            <a:r>
+              <a:rPr lang="en-US" sz="864" b="1" spc="-54" kern="0" dirty="0">
+                <a:solidFill>
+                  <a:srgbClr val="64748B"/>
+                </a:solidFill>
+                <a:latin typeface="Malgun Gothic" pitchFamily="34" charset="0"/>
+                <a:ea typeface="Malgun Gothic" pitchFamily="34" charset="-122"/>
+                <a:cs typeface="Malgun Gothic" pitchFamily="34" charset="-120"/>
+              </a:rPr>
+              <a:t>TOTAL CELLS PROFILED</a:t>
+            </a:r>
+            <a:endParaRPr lang="en-US" sz="864" dirty="0"/>
+          </a:p>
+        </p:txBody>
+      </p:sp>
+      <p:sp>
+        <p:nvSpPr>
+          <p:cNvPr id="12" name="Text 10"/>
+          <p:cNvSpPr txBox="1"/>
+          <p:nvPr/>
+        </p:nvSpPr>
+        <p:spPr>
+          <a:xfrm>
+            <a:off x="676290" y="5909401"/>
+            <a:ext cx="3564606" cy="365760"/>
+          </a:xfrm>
+          <a:prstGeom prst="rect">
+            <a:avLst/>
+          </a:prstGeom>
+          <a:noFill/>
+          <a:ln/>
+        </p:spPr>
+        <p:txBody>
+          <a:bodyPr wrap="none" lIns="0" tIns="0" rIns="0" bIns="0" rtlCol="0" anchor="t"/>
+          <a:lstStyle/>
+          <a:p>
+            <a:pPr algn="l" indent="0" marL="0">
+              <a:lnSpc>
+                <a:spcPts val="2880"/>
+              </a:lnSpc>
+              <a:buNone/>
+            </a:pPr>
+            <a:r>
+              <a:rPr lang="en-US" sz="1920" b="1" spc="-54" kern="0" dirty="0">
+                <a:solidFill>
+                  <a:srgbClr val="0F172A"/>
+                </a:solidFill>
+                <a:latin typeface="Malgun Gothic" pitchFamily="34" charset="0"/>
+                <a:ea typeface="Malgun Gothic" pitchFamily="34" charset="-122"/>
+                <a:cs typeface="Malgun Gothic" pitchFamily="34" charset="-120"/>
+              </a:rPr>
+              <a:t>12,500,000+</a:t>
+            </a:r>
+            <a:endParaRPr lang="en-US" sz="1920" dirty="0"/>
+          </a:p>
+        </p:txBody>
+      </p:sp>
+      <p:sp>
+        <p:nvSpPr>
+          <p:cNvPr id="13" name="Shape 11"/>
+          <p:cNvSpPr/>
+          <p:nvPr/>
+        </p:nvSpPr>
+        <p:spPr>
+          <a:xfrm>
+            <a:off x="4292559" y="5565861"/>
+            <a:ext cx="3606851" cy="873069"/>
+          </a:xfrm>
+          <a:prstGeom prst="roundRect">
+            <a:avLst>
+              <a:gd name="adj" fmla="val 8724"/>
+            </a:avLst>
+          </a:prstGeom>
+          <a:solidFill>
+            <a:srgbClr val="FFFFFF"/>
+          </a:solidFill>
+          <a:ln/>
+        </p:spPr>
+      </p:sp>
+      <p:sp>
+        <p:nvSpPr>
+          <p:cNvPr id="14" name="Shape 12"/>
+          <p:cNvSpPr/>
+          <p:nvPr/>
+        </p:nvSpPr>
+        <p:spPr>
+          <a:xfrm>
+            <a:off x="4292559" y="5565861"/>
+            <a:ext cx="3606851" cy="28621"/>
+          </a:xfrm>
+          <a:prstGeom prst="rect">
+            <a:avLst/>
+          </a:prstGeom>
+          <a:solidFill>
+            <a:srgbClr val="10B981"/>
+          </a:solidFill>
+          <a:ln/>
+        </p:spPr>
+      </p:sp>
+      <p:sp>
+        <p:nvSpPr>
+          <p:cNvPr id="15" name="Shape 13"/>
+          <p:cNvSpPr/>
+          <p:nvPr/>
+        </p:nvSpPr>
+        <p:spPr>
+          <a:xfrm>
+            <a:off x="7889809" y="5565861"/>
+            <a:ext cx="9510" cy="873069"/>
+          </a:xfrm>
+          <a:prstGeom prst="rect">
+            <a:avLst/>
+          </a:prstGeom>
+          <a:solidFill>
+            <a:srgbClr val="E2E8F0"/>
+          </a:solidFill>
+          <a:ln/>
+        </p:spPr>
+      </p:sp>
+      <p:sp>
+        <p:nvSpPr>
+          <p:cNvPr id="16" name="Shape 14"/>
+          <p:cNvSpPr/>
+          <p:nvPr/>
+        </p:nvSpPr>
+        <p:spPr>
+          <a:xfrm>
+            <a:off x="4292559" y="6429421"/>
+            <a:ext cx="3606851" cy="9510"/>
+          </a:xfrm>
+          <a:prstGeom prst="rect">
+            <a:avLst/>
+          </a:prstGeom>
+          <a:solidFill>
+            <a:srgbClr val="E2E8F0"/>
+          </a:solidFill>
+          <a:ln/>
+        </p:spPr>
+      </p:sp>
+      <p:sp>
+        <p:nvSpPr>
+          <p:cNvPr id="17" name="Shape 15"/>
+          <p:cNvSpPr/>
+          <p:nvPr/>
+        </p:nvSpPr>
+        <p:spPr>
+          <a:xfrm>
+            <a:off x="4292559" y="5565861"/>
+            <a:ext cx="9510" cy="873069"/>
+          </a:xfrm>
+          <a:prstGeom prst="rect">
+            <a:avLst/>
+          </a:prstGeom>
+          <a:solidFill>
+            <a:srgbClr val="E2E8F0"/>
+          </a:solidFill>
+          <a:ln/>
+        </p:spPr>
+      </p:sp>
+      <p:sp>
+        <p:nvSpPr>
+          <p:cNvPr id="18" name="Text 16"/>
+          <p:cNvSpPr txBox="1"/>
+          <p:nvPr/>
+        </p:nvSpPr>
+        <p:spPr>
+          <a:xfrm>
+            <a:off x="4435389" y="5740695"/>
+            <a:ext cx="3564697" cy="164592"/>
+          </a:xfrm>
+          <a:prstGeom prst="rect">
+            <a:avLst/>
+          </a:prstGeom>
+          <a:noFill/>
+          <a:ln/>
+        </p:spPr>
+        <p:txBody>
+          <a:bodyPr wrap="none" lIns="0" tIns="0" rIns="0" bIns="0" rtlCol="0" anchor="t"/>
+          <a:lstStyle/>
+          <a:p>
+            <a:pPr algn="l" indent="0" marL="0">
+              <a:lnSpc>
+                <a:spcPts val="1296"/>
+              </a:lnSpc>
+              <a:buNone/>
+            </a:pPr>
+            <a:r>
+              <a:rPr lang="en-US" sz="864" b="1" spc="-54" kern="0" dirty="0">
+                <a:solidFill>
+                  <a:srgbClr val="64748B"/>
+                </a:solidFill>
+                <a:latin typeface="Malgun Gothic" pitchFamily="34" charset="0"/>
+                <a:ea typeface="Malgun Gothic" pitchFamily="34" charset="-122"/>
+                <a:cs typeface="Malgun Gothic" pitchFamily="34" charset="-120"/>
+              </a:rPr>
+              <a:t>ORR (OBJECTIVE RESPONSE)</a:t>
+            </a:r>
+            <a:endParaRPr lang="en-US" sz="864" dirty="0"/>
+          </a:p>
+        </p:txBody>
+      </p:sp>
+      <p:sp>
+        <p:nvSpPr>
+          <p:cNvPr id="19" name="Text 17"/>
+          <p:cNvSpPr txBox="1"/>
+          <p:nvPr/>
+        </p:nvSpPr>
+        <p:spPr>
+          <a:xfrm>
+            <a:off x="4435389" y="5909401"/>
+            <a:ext cx="3564697" cy="365760"/>
+          </a:xfrm>
+          <a:prstGeom prst="rect">
+            <a:avLst/>
+          </a:prstGeom>
+          <a:noFill/>
+          <a:ln/>
+        </p:spPr>
+        <p:txBody>
+          <a:bodyPr wrap="none" lIns="0" tIns="0" rIns="0" bIns="0" rtlCol="0" anchor="t"/>
+          <a:lstStyle/>
+          <a:p>
+            <a:pPr algn="l" indent="0" marL="0">
+              <a:lnSpc>
+                <a:spcPts val="2880"/>
+              </a:lnSpc>
+              <a:buNone/>
+            </a:pPr>
+            <a:r>
+              <a:rPr lang="en-US" sz="1920" b="1" spc="-54" kern="0" dirty="0">
+                <a:solidFill>
+                  <a:srgbClr val="10B981"/>
+                </a:solidFill>
+                <a:latin typeface="Malgun Gothic" pitchFamily="34" charset="0"/>
+                <a:ea typeface="Malgun Gothic" pitchFamily="34" charset="-122"/>
+                <a:cs typeface="Malgun Gothic" pitchFamily="34" charset="-120"/>
+              </a:rPr>
+              <a:t>84.2%</a:t>
+            </a:r>
+            <a:endParaRPr lang="en-US" sz="1920" dirty="0"/>
+          </a:p>
+        </p:txBody>
+      </p:sp>
+      <p:sp>
+        <p:nvSpPr>
+          <p:cNvPr id="20" name="Shape 18"/>
+          <p:cNvSpPr/>
+          <p:nvPr/>
+        </p:nvSpPr>
+        <p:spPr>
+          <a:xfrm>
+            <a:off x="8051749" y="5565861"/>
+            <a:ext cx="3606759" cy="873069"/>
+          </a:xfrm>
+          <a:prstGeom prst="roundRect">
+            <a:avLst>
+              <a:gd name="adj" fmla="val 8724"/>
+            </a:avLst>
+          </a:prstGeom>
+          <a:solidFill>
+            <a:srgbClr val="FFFFFF"/>
+          </a:solidFill>
+          <a:ln/>
+        </p:spPr>
+      </p:sp>
+      <p:sp>
+        <p:nvSpPr>
+          <p:cNvPr id="21" name="Shape 19"/>
+          <p:cNvSpPr/>
+          <p:nvPr/>
+        </p:nvSpPr>
+        <p:spPr>
+          <a:xfrm>
+            <a:off x="8051749" y="5565861"/>
+            <a:ext cx="3606759" cy="28621"/>
+          </a:xfrm>
+          <a:prstGeom prst="rect">
+            <a:avLst/>
+          </a:prstGeom>
+          <a:solidFill>
+            <a:srgbClr val="6366F1"/>
+          </a:solidFill>
+          <a:ln/>
+        </p:spPr>
+      </p:sp>
+      <p:sp>
+        <p:nvSpPr>
+          <p:cNvPr id="22" name="Shape 20"/>
+          <p:cNvSpPr/>
+          <p:nvPr/>
+        </p:nvSpPr>
+        <p:spPr>
+          <a:xfrm>
+            <a:off x="11648999" y="5565861"/>
+            <a:ext cx="9510" cy="873069"/>
+          </a:xfrm>
+          <a:prstGeom prst="rect">
+            <a:avLst/>
+          </a:prstGeom>
+          <a:solidFill>
+            <a:srgbClr val="E2E8F0"/>
+          </a:solidFill>
+          <a:ln/>
+        </p:spPr>
+      </p:sp>
+      <p:sp>
+        <p:nvSpPr>
+          <p:cNvPr id="23" name="Shape 21"/>
+          <p:cNvSpPr/>
+          <p:nvPr/>
+        </p:nvSpPr>
+        <p:spPr>
+          <a:xfrm>
+            <a:off x="8051749" y="6429421"/>
+            <a:ext cx="3606759" cy="9510"/>
+          </a:xfrm>
+          <a:prstGeom prst="rect">
+            <a:avLst/>
+          </a:prstGeom>
+          <a:solidFill>
+            <a:srgbClr val="E2E8F0"/>
+          </a:solidFill>
+          <a:ln/>
+        </p:spPr>
+      </p:sp>
+      <p:sp>
+        <p:nvSpPr>
+          <p:cNvPr id="24" name="Shape 22"/>
+          <p:cNvSpPr/>
+          <p:nvPr/>
+        </p:nvSpPr>
+        <p:spPr>
+          <a:xfrm>
+            <a:off x="8051749" y="5565861"/>
+            <a:ext cx="9510" cy="873069"/>
+          </a:xfrm>
+          <a:prstGeom prst="rect">
+            <a:avLst/>
+          </a:prstGeom>
+          <a:solidFill>
+            <a:srgbClr val="E2E8F0"/>
+          </a:solidFill>
+          <a:ln/>
+        </p:spPr>
+      </p:sp>
+      <p:sp>
+        <p:nvSpPr>
+          <p:cNvPr id="25" name="Text 23"/>
+          <p:cNvSpPr txBox="1"/>
+          <p:nvPr/>
+        </p:nvSpPr>
+        <p:spPr>
+          <a:xfrm>
+            <a:off x="8194670" y="5740695"/>
+            <a:ext cx="3564606" cy="164592"/>
+          </a:xfrm>
+          <a:prstGeom prst="rect">
+            <a:avLst/>
+          </a:prstGeom>
+          <a:noFill/>
+          <a:ln/>
+        </p:spPr>
+        <p:txBody>
+          <a:bodyPr wrap="none" lIns="0" tIns="0" rIns="0" bIns="0" rtlCol="0" anchor="t"/>
+          <a:lstStyle/>
+          <a:p>
+            <a:pPr algn="l" indent="0" marL="0">
+              <a:lnSpc>
+                <a:spcPts val="1296"/>
+              </a:lnSpc>
+              <a:buNone/>
+            </a:pPr>
+            <a:r>
+              <a:rPr lang="en-US" sz="864" b="1" spc="-54" kern="0" dirty="0">
+                <a:solidFill>
+                  <a:srgbClr val="64748B"/>
+                </a:solidFill>
+                <a:latin typeface="Malgun Gothic" pitchFamily="34" charset="0"/>
+                <a:ea typeface="Malgun Gothic" pitchFamily="34" charset="-122"/>
+                <a:cs typeface="Malgun Gothic" pitchFamily="34" charset="-120"/>
+              </a:rPr>
+              <a:t>SEVERE CRS RATE</a:t>
+            </a:r>
+            <a:endParaRPr lang="en-US" sz="864" dirty="0"/>
+          </a:p>
+        </p:txBody>
+      </p:sp>
+      <p:sp>
+        <p:nvSpPr>
+          <p:cNvPr id="26" name="Text 24"/>
+          <p:cNvSpPr txBox="1"/>
+          <p:nvPr/>
+        </p:nvSpPr>
+        <p:spPr>
+          <a:xfrm>
+            <a:off x="8194670" y="5909401"/>
+            <a:ext cx="3564606" cy="365760"/>
+          </a:xfrm>
+          <a:prstGeom prst="rect">
+            <a:avLst/>
+          </a:prstGeom>
+          <a:noFill/>
+          <a:ln/>
+        </p:spPr>
+        <p:txBody>
+          <a:bodyPr wrap="none" lIns="0" tIns="0" rIns="0" bIns="0" rtlCol="0" anchor="t"/>
+          <a:lstStyle/>
+          <a:p>
+            <a:pPr algn="l" indent="0" marL="0">
+              <a:lnSpc>
+                <a:spcPts val="2880"/>
+              </a:lnSpc>
+              <a:buNone/>
+            </a:pPr>
+            <a:r>
+              <a:rPr lang="en-US" sz="1920" b="1" spc="-54" kern="0" dirty="0">
+                <a:solidFill>
+                  <a:srgbClr val="6366F1"/>
+                </a:solidFill>
+                <a:latin typeface="Malgun Gothic" pitchFamily="34" charset="0"/>
+                <a:ea typeface="Malgun Gothic" pitchFamily="34" charset="-122"/>
+                <a:cs typeface="Malgun Gothic" pitchFamily="34" charset="-120"/>
+              </a:rPr>
+              <a:t>0.0% (Zero)</a:t>
+            </a:r>
+            <a:endParaRPr lang="en-US" sz="1920" dirty="0"/>
+          </a:p>
+        </p:txBody>
+      </p:sp>
     </p:spTree>
   </p:cSld>
   <p:clrMapOvr>
@@ -986,16 +1703,9 @@
   <p:cSld name="Slide 2">
     <p:bg>
       <p:bgPr>
-        <a:blipFill dpi="0" rotWithShape="1">
-          <a:blip r:embed="rId1">
-            <a:lum/>
-          </a:blip>
-          <a:srcRect/>
-          <a:stretch>
-            <a:fillRect/>
-          </a:stretch>
-        </a:blipFill>
-        <a:effectLst/>
+        <a:solidFill>
+          <a:srgbClr val="F8FAFC"/>
+        </a:solidFill>
       </p:bgPr>
     </p:bg>
     <p:spTree>
@@ -1012,6 +1722,2191 @@
           <a:chExt cx="0" cy="0"/>
         </a:xfrm>
       </p:grpSpPr>
+      <p:sp>
+        <p:nvSpPr>
+          <p:cNvPr id="2" name="Shape 0"/>
+          <p:cNvSpPr/>
+          <p:nvPr/>
+        </p:nvSpPr>
+        <p:spPr>
+          <a:xfrm>
+            <a:off x="533370" y="466710"/>
+            <a:ext cx="2692176" cy="374447"/>
+          </a:xfrm>
+          <a:prstGeom prst="roundRect">
+            <a:avLst>
+              <a:gd name="adj" fmla="val 10183"/>
+            </a:avLst>
+          </a:prstGeom>
+          <a:solidFill>
+            <a:srgbClr val="E0F2FE"/>
+          </a:solidFill>
+          <a:ln/>
+        </p:spPr>
+      </p:sp>
+      <p:sp>
+        <p:nvSpPr>
+          <p:cNvPr id="3" name="Text 1"/>
+          <p:cNvSpPr txBox="1"/>
+          <p:nvPr/>
+        </p:nvSpPr>
+        <p:spPr>
+          <a:xfrm>
+            <a:off x="609630" y="503286"/>
+            <a:ext cx="2720797" cy="298369"/>
+          </a:xfrm>
+          <a:prstGeom prst="rect">
+            <a:avLst/>
+          </a:prstGeom>
+          <a:noFill/>
+          <a:ln/>
+        </p:spPr>
+        <p:txBody>
+          <a:bodyPr wrap="none" lIns="0" tIns="0" rIns="0" bIns="0" rtlCol="0" anchor="t"/>
+          <a:lstStyle/>
+          <a:p>
+            <a:pPr algn="l" indent="0" marL="0">
+              <a:lnSpc>
+                <a:spcPts val="2349"/>
+              </a:lnSpc>
+              <a:buNone/>
+            </a:pPr>
+            <a:r>
+              <a:rPr lang="en-US" sz="1566" b="1" spc="-54" kern="0" dirty="0">
+                <a:solidFill>
+                  <a:srgbClr val="0284C7"/>
+                </a:solidFill>
+                <a:latin typeface="Malgun Gothic" pitchFamily="34" charset="0"/>
+                <a:ea typeface="Malgun Gothic" pitchFamily="34" charset="-122"/>
+                <a:cs typeface="Malgun Gothic" pitchFamily="34" charset="-120"/>
+              </a:rPr>
+              <a:t>BENCHMARK COMPARISON</a:t>
+            </a:r>
+            <a:endParaRPr lang="en-US" sz="1566" dirty="0"/>
+          </a:p>
+        </p:txBody>
+      </p:sp>
+      <p:sp>
+        <p:nvSpPr>
+          <p:cNvPr id="4" name="Text 2"/>
+          <p:cNvSpPr txBox="1"/>
+          <p:nvPr/>
+        </p:nvSpPr>
+        <p:spPr>
+          <a:xfrm>
+            <a:off x="514350" y="879287"/>
+            <a:ext cx="12034236" cy="266730"/>
+          </a:xfrm>
+          <a:prstGeom prst="rect">
+            <a:avLst/>
+          </a:prstGeom>
+          <a:noFill/>
+          <a:ln/>
+        </p:spPr>
+        <p:txBody>
+          <a:bodyPr wrap="none" lIns="0" tIns="0" rIns="0" bIns="0" rtlCol="0" anchor="t"/>
+          <a:lstStyle/>
+          <a:p>
+            <a:pPr algn="l" indent="0" marL="0">
+              <a:lnSpc>
+                <a:spcPts val="2100"/>
+              </a:lnSpc>
+              <a:buNone/>
+            </a:pPr>
+            <a:r>
+              <a:rPr lang="en-US" sz="1680" b="1" spc="-54" kern="0" dirty="0">
+                <a:solidFill>
+                  <a:srgbClr val="0F172A"/>
+                </a:solidFill>
+                <a:latin typeface="Malgun Gothic" pitchFamily="34" charset="0"/>
+                <a:ea typeface="Malgun Gothic" pitchFamily="34" charset="-122"/>
+                <a:cs typeface="Malgun Gothic" pitchFamily="34" charset="-120"/>
+              </a:rPr>
+              <a:t>기존 표준 치료법(SoC) 대비 임상 효능 비교 행렬</a:t>
+            </a:r>
+            <a:endParaRPr lang="en-US" sz="1680" dirty="0"/>
+          </a:p>
+        </p:txBody>
+      </p:sp>
+      <p:sp>
+        <p:nvSpPr>
+          <p:cNvPr id="5" name="Shape 3"/>
+          <p:cNvSpPr/>
+          <p:nvPr/>
+        </p:nvSpPr>
+        <p:spPr>
+          <a:xfrm>
+            <a:off x="533370" y="2394448"/>
+            <a:ext cx="11125230" cy="2638227"/>
+          </a:xfrm>
+          <a:prstGeom prst="roundRect">
+            <a:avLst>
+              <a:gd name="adj" fmla="val 2887"/>
+            </a:avLst>
+          </a:prstGeom>
+          <a:solidFill>
+            <a:srgbClr val="FFFFFF"/>
+          </a:solidFill>
+          <a:ln w="9525">
+            <a:solidFill>
+              <a:srgbClr val="E2E8F0"/>
+            </a:solidFill>
+            <a:prstDash val="solid"/>
+          </a:ln>
+        </p:spPr>
+      </p:sp>
+      <p:sp>
+        <p:nvSpPr>
+          <p:cNvPr id="6" name="Shape 4"/>
+          <p:cNvSpPr/>
+          <p:nvPr/>
+        </p:nvSpPr>
+        <p:spPr>
+          <a:xfrm>
+            <a:off x="547726" y="2408804"/>
+            <a:ext cx="11096610" cy="900958"/>
+          </a:xfrm>
+          <a:prstGeom prst="rect">
+            <a:avLst/>
+          </a:prstGeom>
+          <a:solidFill>
+            <a:srgbClr val="FFFFFF"/>
+          </a:solidFill>
+          <a:ln/>
+        </p:spPr>
+      </p:sp>
+      <p:sp>
+        <p:nvSpPr>
+          <p:cNvPr id="7" name="Shape 5"/>
+          <p:cNvSpPr/>
+          <p:nvPr/>
+        </p:nvSpPr>
+        <p:spPr>
+          <a:xfrm>
+            <a:off x="547726" y="2408804"/>
+            <a:ext cx="11096610" cy="9510"/>
+          </a:xfrm>
+          <a:prstGeom prst="rect">
+            <a:avLst/>
+          </a:prstGeom>
+          <a:solidFill>
+            <a:srgbClr val="D1D9E0">
+              <a:alpha val="70000"/>
+            </a:srgbClr>
+          </a:solidFill>
+          <a:ln/>
+        </p:spPr>
+      </p:sp>
+      <p:sp>
+        <p:nvSpPr>
+          <p:cNvPr id="8" name="Shape 6"/>
+          <p:cNvSpPr/>
+          <p:nvPr/>
+        </p:nvSpPr>
+        <p:spPr>
+          <a:xfrm>
+            <a:off x="547726" y="2408804"/>
+            <a:ext cx="2410907" cy="900958"/>
+          </a:xfrm>
+          <a:prstGeom prst="rect">
+            <a:avLst/>
+          </a:prstGeom>
+          <a:solidFill>
+            <a:srgbClr val="0F172A"/>
+          </a:solidFill>
+          <a:ln w="9525">
+            <a:solidFill>
+              <a:srgbClr val="D1D9E0"/>
+            </a:solidFill>
+            <a:prstDash val="solid"/>
+          </a:ln>
+        </p:spPr>
+      </p:sp>
+      <p:sp>
+        <p:nvSpPr>
+          <p:cNvPr id="9" name="Text 7"/>
+          <p:cNvSpPr txBox="1"/>
+          <p:nvPr/>
+        </p:nvSpPr>
+        <p:spPr>
+          <a:xfrm>
+            <a:off x="671535" y="2524018"/>
+            <a:ext cx="2163196" cy="662940"/>
+          </a:xfrm>
+          <a:prstGeom prst="rect">
+            <a:avLst/>
+          </a:prstGeom>
+          <a:noFill/>
+          <a:ln/>
+        </p:spPr>
+        <p:txBody>
+          <a:bodyPr wrap="square" lIns="0" tIns="0" rIns="0" bIns="0" rtlCol="0" anchor="t"/>
+          <a:lstStyle/>
+          <a:p>
+            <a:pPr algn="l" indent="0" marL="0">
+              <a:lnSpc>
+                <a:spcPts val="2610"/>
+              </a:lnSpc>
+              <a:buNone/>
+            </a:pPr>
+            <a:r>
+              <a:rPr lang="en-US" sz="1740" b="1" spc="-54" kern="0" dirty="0">
+                <a:solidFill>
+                  <a:srgbClr val="FFFFFF"/>
+                </a:solidFill>
+                <a:latin typeface="Malgun Gothic" pitchFamily="34" charset="0"/>
+                <a:ea typeface="Malgun Gothic" pitchFamily="34" charset="-122"/>
+                <a:cs typeface="Malgun Gothic" pitchFamily="34" charset="-120"/>
+              </a:rPr>
+              <a:t>CLINICAL PARAMETER</a:t>
+            </a:r>
+            <a:endParaRPr lang="en-US" sz="1740" dirty="0"/>
+          </a:p>
+        </p:txBody>
+      </p:sp>
+      <p:sp>
+        <p:nvSpPr>
+          <p:cNvPr id="10" name="Shape 8"/>
+          <p:cNvSpPr/>
+          <p:nvPr/>
+        </p:nvSpPr>
+        <p:spPr>
+          <a:xfrm>
+            <a:off x="2958541" y="2408804"/>
+            <a:ext cx="2704612" cy="900958"/>
+          </a:xfrm>
+          <a:prstGeom prst="rect">
+            <a:avLst/>
+          </a:prstGeom>
+          <a:solidFill>
+            <a:srgbClr val="0F172A"/>
+          </a:solidFill>
+          <a:ln w="9525">
+            <a:solidFill>
+              <a:srgbClr val="D1D9E0"/>
+            </a:solidFill>
+            <a:prstDash val="solid"/>
+          </a:ln>
+        </p:spPr>
+      </p:sp>
+      <p:sp>
+        <p:nvSpPr>
+          <p:cNvPr id="11" name="Text 9"/>
+          <p:cNvSpPr txBox="1"/>
+          <p:nvPr/>
+        </p:nvSpPr>
+        <p:spPr>
+          <a:xfrm>
+            <a:off x="3082351" y="2524018"/>
+            <a:ext cx="2456993" cy="662940"/>
+          </a:xfrm>
+          <a:prstGeom prst="rect">
+            <a:avLst/>
+          </a:prstGeom>
+          <a:noFill/>
+          <a:ln/>
+        </p:spPr>
+        <p:txBody>
+          <a:bodyPr wrap="square" lIns="0" tIns="0" rIns="0" bIns="0" rtlCol="0" anchor="t"/>
+          <a:lstStyle/>
+          <a:p>
+            <a:pPr algn="l" indent="0" marL="0">
+              <a:lnSpc>
+                <a:spcPts val="2610"/>
+              </a:lnSpc>
+              <a:buNone/>
+            </a:pPr>
+            <a:r>
+              <a:rPr lang="en-US" sz="1740" b="1" spc="-54" kern="0" dirty="0">
+                <a:solidFill>
+                  <a:srgbClr val="FFFFFF"/>
+                </a:solidFill>
+                <a:latin typeface="Malgun Gothic" pitchFamily="34" charset="0"/>
+                <a:ea typeface="Malgun Gothic" pitchFamily="34" charset="-122"/>
+                <a:cs typeface="Malgun Gothic" pitchFamily="34" charset="-120"/>
+              </a:rPr>
+              <a:t>STANDARD SOC (CHEMO)</a:t>
+            </a:r>
+            <a:endParaRPr lang="en-US" sz="1740" dirty="0"/>
+          </a:p>
+        </p:txBody>
+      </p:sp>
+      <p:sp>
+        <p:nvSpPr>
+          <p:cNvPr id="12" name="Shape 10"/>
+          <p:cNvSpPr/>
+          <p:nvPr/>
+        </p:nvSpPr>
+        <p:spPr>
+          <a:xfrm>
+            <a:off x="5663154" y="2408804"/>
+            <a:ext cx="2958267" cy="900958"/>
+          </a:xfrm>
+          <a:prstGeom prst="rect">
+            <a:avLst/>
+          </a:prstGeom>
+          <a:solidFill>
+            <a:srgbClr val="0F172A"/>
+          </a:solidFill>
+          <a:ln w="9525">
+            <a:solidFill>
+              <a:srgbClr val="D1D9E0"/>
+            </a:solidFill>
+            <a:prstDash val="solid"/>
+          </a:ln>
+        </p:spPr>
+      </p:sp>
+      <p:sp>
+        <p:nvSpPr>
+          <p:cNvPr id="13" name="Text 11"/>
+          <p:cNvSpPr txBox="1"/>
+          <p:nvPr/>
+        </p:nvSpPr>
+        <p:spPr>
+          <a:xfrm>
+            <a:off x="5786963" y="2524018"/>
+            <a:ext cx="2710647" cy="662940"/>
+          </a:xfrm>
+          <a:prstGeom prst="rect">
+            <a:avLst/>
+          </a:prstGeom>
+          <a:noFill/>
+          <a:ln/>
+        </p:spPr>
+        <p:txBody>
+          <a:bodyPr wrap="square" lIns="0" tIns="0" rIns="0" bIns="0" rtlCol="0" anchor="t"/>
+          <a:lstStyle/>
+          <a:p>
+            <a:pPr algn="l" indent="0" marL="0">
+              <a:lnSpc>
+                <a:spcPts val="2610"/>
+              </a:lnSpc>
+              <a:buNone/>
+            </a:pPr>
+            <a:r>
+              <a:rPr lang="en-US" sz="1740" b="1" spc="-54" kern="0" dirty="0">
+                <a:solidFill>
+                  <a:srgbClr val="FFFFFF"/>
+                </a:solidFill>
+                <a:latin typeface="Malgun Gothic" pitchFamily="34" charset="0"/>
+                <a:ea typeface="Malgun Gothic" pitchFamily="34" charset="-122"/>
+                <a:cs typeface="Malgun Gothic" pitchFamily="34" charset="-120"/>
+              </a:rPr>
+              <a:t>1ST GEN IMMUNOTHERAPY</a:t>
+            </a:r>
+            <a:endParaRPr lang="en-US" sz="1740" dirty="0"/>
+          </a:p>
+        </p:txBody>
+      </p:sp>
+      <p:sp>
+        <p:nvSpPr>
+          <p:cNvPr id="14" name="Shape 12"/>
+          <p:cNvSpPr/>
+          <p:nvPr/>
+        </p:nvSpPr>
+        <p:spPr>
+          <a:xfrm>
+            <a:off x="8621420" y="2408804"/>
+            <a:ext cx="3022824" cy="900958"/>
+          </a:xfrm>
+          <a:prstGeom prst="rect">
+            <a:avLst/>
+          </a:prstGeom>
+          <a:solidFill>
+            <a:srgbClr val="0F172A"/>
+          </a:solidFill>
+          <a:ln w="9525">
+            <a:solidFill>
+              <a:srgbClr val="D1D9E0"/>
+            </a:solidFill>
+            <a:prstDash val="solid"/>
+          </a:ln>
+        </p:spPr>
+      </p:sp>
+      <p:sp>
+        <p:nvSpPr>
+          <p:cNvPr id="15" name="Text 13"/>
+          <p:cNvSpPr txBox="1"/>
+          <p:nvPr/>
+        </p:nvSpPr>
+        <p:spPr>
+          <a:xfrm>
+            <a:off x="8745322" y="2524018"/>
+            <a:ext cx="2775204" cy="662940"/>
+          </a:xfrm>
+          <a:prstGeom prst="rect">
+            <a:avLst/>
+          </a:prstGeom>
+          <a:noFill/>
+          <a:ln/>
+        </p:spPr>
+        <p:txBody>
+          <a:bodyPr wrap="square" lIns="0" tIns="0" rIns="0" bIns="0" rtlCol="0" anchor="t"/>
+          <a:lstStyle/>
+          <a:p>
+            <a:pPr algn="l" indent="0" marL="0">
+              <a:lnSpc>
+                <a:spcPts val="2610"/>
+              </a:lnSpc>
+              <a:buNone/>
+            </a:pPr>
+            <a:r>
+              <a:rPr lang="en-US" sz="1740" b="1" spc="-54" kern="0" dirty="0">
+                <a:solidFill>
+                  <a:srgbClr val="FFFFFF"/>
+                </a:solidFill>
+                <a:latin typeface="Malgun Gothic" pitchFamily="34" charset="0"/>
+                <a:ea typeface="Malgun Gothic" pitchFamily="34" charset="-122"/>
+                <a:cs typeface="Malgun Gothic" pitchFamily="34" charset="-120"/>
+              </a:rPr>
+              <a:t>OUR SINGLE-CELL PLATFORM</a:t>
+            </a:r>
+            <a:endParaRPr lang="en-US" sz="1740" dirty="0"/>
+          </a:p>
+        </p:txBody>
+      </p:sp>
+      <p:sp>
+        <p:nvSpPr>
+          <p:cNvPr id="16" name="Shape 14"/>
+          <p:cNvSpPr/>
+          <p:nvPr/>
+        </p:nvSpPr>
+        <p:spPr>
+          <a:xfrm>
+            <a:off x="547726" y="3309762"/>
+            <a:ext cx="11096610" cy="569580"/>
+          </a:xfrm>
+          <a:prstGeom prst="rect">
+            <a:avLst/>
+          </a:prstGeom>
+          <a:solidFill>
+            <a:srgbClr val="FFFFFF"/>
+          </a:solidFill>
+          <a:ln/>
+        </p:spPr>
+      </p:sp>
+      <p:sp>
+        <p:nvSpPr>
+          <p:cNvPr id="17" name="Shape 15"/>
+          <p:cNvSpPr/>
+          <p:nvPr/>
+        </p:nvSpPr>
+        <p:spPr>
+          <a:xfrm>
+            <a:off x="547726" y="3309762"/>
+            <a:ext cx="11096610" cy="9510"/>
+          </a:xfrm>
+          <a:prstGeom prst="rect">
+            <a:avLst/>
+          </a:prstGeom>
+          <a:solidFill>
+            <a:srgbClr val="D1D9E0">
+              <a:alpha val="70000"/>
+            </a:srgbClr>
+          </a:solidFill>
+          <a:ln/>
+        </p:spPr>
+      </p:sp>
+      <p:sp>
+        <p:nvSpPr>
+          <p:cNvPr id="18" name="Shape 16"/>
+          <p:cNvSpPr/>
+          <p:nvPr/>
+        </p:nvSpPr>
+        <p:spPr>
+          <a:xfrm>
+            <a:off x="547726" y="3309762"/>
+            <a:ext cx="2410907" cy="9510"/>
+          </a:xfrm>
+          <a:prstGeom prst="rect">
+            <a:avLst/>
+          </a:prstGeom>
+          <a:solidFill>
+            <a:srgbClr val="D1D9E0"/>
+          </a:solidFill>
+          <a:ln/>
+        </p:spPr>
+      </p:sp>
+      <p:sp>
+        <p:nvSpPr>
+          <p:cNvPr id="19" name="Shape 17"/>
+          <p:cNvSpPr/>
+          <p:nvPr/>
+        </p:nvSpPr>
+        <p:spPr>
+          <a:xfrm>
+            <a:off x="2949031" y="3309762"/>
+            <a:ext cx="9510" cy="569580"/>
+          </a:xfrm>
+          <a:prstGeom prst="rect">
+            <a:avLst/>
+          </a:prstGeom>
+          <a:solidFill>
+            <a:srgbClr val="D1D9E0"/>
+          </a:solidFill>
+          <a:ln/>
+        </p:spPr>
+      </p:sp>
+      <p:sp>
+        <p:nvSpPr>
+          <p:cNvPr id="20" name="Shape 18"/>
+          <p:cNvSpPr/>
+          <p:nvPr/>
+        </p:nvSpPr>
+        <p:spPr>
+          <a:xfrm>
+            <a:off x="547726" y="3869832"/>
+            <a:ext cx="2410907" cy="9510"/>
+          </a:xfrm>
+          <a:prstGeom prst="rect">
+            <a:avLst/>
+          </a:prstGeom>
+          <a:solidFill>
+            <a:srgbClr val="F1F5F9"/>
+          </a:solidFill>
+          <a:ln/>
+        </p:spPr>
+      </p:sp>
+      <p:sp>
+        <p:nvSpPr>
+          <p:cNvPr id="21" name="Shape 19"/>
+          <p:cNvSpPr/>
+          <p:nvPr/>
+        </p:nvSpPr>
+        <p:spPr>
+          <a:xfrm>
+            <a:off x="547726" y="3309762"/>
+            <a:ext cx="9510" cy="569580"/>
+          </a:xfrm>
+          <a:prstGeom prst="rect">
+            <a:avLst/>
+          </a:prstGeom>
+          <a:solidFill>
+            <a:srgbClr val="D1D9E0"/>
+          </a:solidFill>
+          <a:ln/>
+        </p:spPr>
+      </p:sp>
+      <p:sp>
+        <p:nvSpPr>
+          <p:cNvPr id="22" name="Text 20"/>
+          <p:cNvSpPr txBox="1"/>
+          <p:nvPr/>
+        </p:nvSpPr>
+        <p:spPr>
+          <a:xfrm>
+            <a:off x="671535" y="3424977"/>
+            <a:ext cx="2314164" cy="331470"/>
+          </a:xfrm>
+          <a:prstGeom prst="rect">
+            <a:avLst/>
+          </a:prstGeom>
+          <a:noFill/>
+          <a:ln/>
+        </p:spPr>
+        <p:txBody>
+          <a:bodyPr wrap="none" lIns="0" tIns="0" rIns="0" bIns="0" rtlCol="0" anchor="t"/>
+          <a:lstStyle/>
+          <a:p>
+            <a:pPr algn="l" indent="0" marL="0">
+              <a:lnSpc>
+                <a:spcPts val="2610"/>
+              </a:lnSpc>
+              <a:buNone/>
+            </a:pPr>
+            <a:r>
+              <a:rPr lang="en-US" sz="1740" b="1" spc="-54" kern="0" dirty="0">
+                <a:solidFill>
+                  <a:srgbClr val="334155"/>
+                </a:solidFill>
+                <a:latin typeface="Malgun Gothic" pitchFamily="34" charset="0"/>
+                <a:ea typeface="Malgun Gothic" pitchFamily="34" charset="-122"/>
+                <a:cs typeface="Malgun Gothic" pitchFamily="34" charset="-120"/>
+              </a:rPr>
+              <a:t>Target Specificity</a:t>
+            </a:r>
+            <a:endParaRPr lang="en-US" sz="1740" dirty="0"/>
+          </a:p>
+        </p:txBody>
+      </p:sp>
+      <p:sp>
+        <p:nvSpPr>
+          <p:cNvPr id="23" name="Shape 21"/>
+          <p:cNvSpPr/>
+          <p:nvPr/>
+        </p:nvSpPr>
+        <p:spPr>
+          <a:xfrm>
+            <a:off x="2958541" y="3309762"/>
+            <a:ext cx="2704612" cy="9510"/>
+          </a:xfrm>
+          <a:prstGeom prst="rect">
+            <a:avLst/>
+          </a:prstGeom>
+          <a:solidFill>
+            <a:srgbClr val="D1D9E0"/>
+          </a:solidFill>
+          <a:ln/>
+        </p:spPr>
+      </p:sp>
+      <p:sp>
+        <p:nvSpPr>
+          <p:cNvPr id="24" name="Shape 22"/>
+          <p:cNvSpPr/>
+          <p:nvPr/>
+        </p:nvSpPr>
+        <p:spPr>
+          <a:xfrm>
+            <a:off x="5653644" y="3309762"/>
+            <a:ext cx="9510" cy="569580"/>
+          </a:xfrm>
+          <a:prstGeom prst="rect">
+            <a:avLst/>
+          </a:prstGeom>
+          <a:solidFill>
+            <a:srgbClr val="D1D9E0"/>
+          </a:solidFill>
+          <a:ln/>
+        </p:spPr>
+      </p:sp>
+      <p:sp>
+        <p:nvSpPr>
+          <p:cNvPr id="25" name="Shape 23"/>
+          <p:cNvSpPr/>
+          <p:nvPr/>
+        </p:nvSpPr>
+        <p:spPr>
+          <a:xfrm>
+            <a:off x="2958541" y="3869832"/>
+            <a:ext cx="2704612" cy="9510"/>
+          </a:xfrm>
+          <a:prstGeom prst="rect">
+            <a:avLst/>
+          </a:prstGeom>
+          <a:solidFill>
+            <a:srgbClr val="F1F5F9"/>
+          </a:solidFill>
+          <a:ln/>
+        </p:spPr>
+      </p:sp>
+      <p:sp>
+        <p:nvSpPr>
+          <p:cNvPr id="26" name="Shape 24"/>
+          <p:cNvSpPr/>
+          <p:nvPr/>
+        </p:nvSpPr>
+        <p:spPr>
+          <a:xfrm>
+            <a:off x="2958541" y="3309762"/>
+            <a:ext cx="9510" cy="569580"/>
+          </a:xfrm>
+          <a:prstGeom prst="rect">
+            <a:avLst/>
+          </a:prstGeom>
+          <a:solidFill>
+            <a:srgbClr val="D1D9E0"/>
+          </a:solidFill>
+          <a:ln/>
+        </p:spPr>
+      </p:sp>
+      <p:sp>
+        <p:nvSpPr>
+          <p:cNvPr id="27" name="Text 25"/>
+          <p:cNvSpPr txBox="1"/>
+          <p:nvPr/>
+        </p:nvSpPr>
+        <p:spPr>
+          <a:xfrm>
+            <a:off x="3082351" y="3424977"/>
+            <a:ext cx="2631460" cy="331470"/>
+          </a:xfrm>
+          <a:prstGeom prst="rect">
+            <a:avLst/>
+          </a:prstGeom>
+          <a:noFill/>
+          <a:ln/>
+        </p:spPr>
+        <p:txBody>
+          <a:bodyPr wrap="none" lIns="0" tIns="0" rIns="0" bIns="0" rtlCol="0" anchor="t"/>
+          <a:lstStyle/>
+          <a:p>
+            <a:pPr algn="l" indent="0" marL="0">
+              <a:lnSpc>
+                <a:spcPts val="2610"/>
+              </a:lnSpc>
+              <a:buNone/>
+            </a:pPr>
+            <a:r>
+              <a:rPr lang="en-US" sz="1740" b="1" spc="-54" kern="0" dirty="0">
+                <a:solidFill>
+                  <a:srgbClr val="B91C1C"/>
+                </a:solidFill>
+                <a:latin typeface="Malgun Gothic" pitchFamily="34" charset="0"/>
+                <a:ea typeface="Malgun Gothic" pitchFamily="34" charset="-122"/>
+                <a:cs typeface="Malgun Gothic" pitchFamily="34" charset="-120"/>
+              </a:rPr>
+              <a:t>Non-Specific</a:t>
+            </a:r>
+            <a:endParaRPr lang="en-US" sz="1740" dirty="0"/>
+          </a:p>
+        </p:txBody>
+      </p:sp>
+      <p:sp>
+        <p:nvSpPr>
+          <p:cNvPr id="28" name="Shape 26"/>
+          <p:cNvSpPr/>
+          <p:nvPr/>
+        </p:nvSpPr>
+        <p:spPr>
+          <a:xfrm>
+            <a:off x="3096707" y="3438327"/>
+            <a:ext cx="1456273" cy="304770"/>
+          </a:xfrm>
+          <a:prstGeom prst="roundRect">
+            <a:avLst>
+              <a:gd name="adj" fmla="val 12511"/>
+            </a:avLst>
+          </a:prstGeom>
+          <a:solidFill>
+            <a:srgbClr val="FEE2E2"/>
+          </a:solidFill>
+          <a:ln/>
+        </p:spPr>
+      </p:sp>
+      <p:sp>
+        <p:nvSpPr>
+          <p:cNvPr id="29" name="Shape 27"/>
+          <p:cNvSpPr/>
+          <p:nvPr/>
+        </p:nvSpPr>
+        <p:spPr>
+          <a:xfrm>
+            <a:off x="5663154" y="3309762"/>
+            <a:ext cx="2958267" cy="9510"/>
+          </a:xfrm>
+          <a:prstGeom prst="rect">
+            <a:avLst/>
+          </a:prstGeom>
+          <a:solidFill>
+            <a:srgbClr val="D1D9E0"/>
+          </a:solidFill>
+          <a:ln/>
+        </p:spPr>
+      </p:sp>
+      <p:sp>
+        <p:nvSpPr>
+          <p:cNvPr id="30" name="Shape 28"/>
+          <p:cNvSpPr/>
+          <p:nvPr/>
+        </p:nvSpPr>
+        <p:spPr>
+          <a:xfrm>
+            <a:off x="8611911" y="3309762"/>
+            <a:ext cx="9510" cy="569580"/>
+          </a:xfrm>
+          <a:prstGeom prst="rect">
+            <a:avLst/>
+          </a:prstGeom>
+          <a:solidFill>
+            <a:srgbClr val="D1D9E0"/>
+          </a:solidFill>
+          <a:ln/>
+        </p:spPr>
+      </p:sp>
+      <p:sp>
+        <p:nvSpPr>
+          <p:cNvPr id="31" name="Shape 29"/>
+          <p:cNvSpPr/>
+          <p:nvPr/>
+        </p:nvSpPr>
+        <p:spPr>
+          <a:xfrm>
+            <a:off x="5663154" y="3869832"/>
+            <a:ext cx="2958267" cy="9510"/>
+          </a:xfrm>
+          <a:prstGeom prst="rect">
+            <a:avLst/>
+          </a:prstGeom>
+          <a:solidFill>
+            <a:srgbClr val="F1F5F9"/>
+          </a:solidFill>
+          <a:ln/>
+        </p:spPr>
+      </p:sp>
+      <p:sp>
+        <p:nvSpPr>
+          <p:cNvPr id="32" name="Shape 30"/>
+          <p:cNvSpPr/>
+          <p:nvPr/>
+        </p:nvSpPr>
+        <p:spPr>
+          <a:xfrm>
+            <a:off x="5663154" y="3309762"/>
+            <a:ext cx="9510" cy="569580"/>
+          </a:xfrm>
+          <a:prstGeom prst="rect">
+            <a:avLst/>
+          </a:prstGeom>
+          <a:solidFill>
+            <a:srgbClr val="D1D9E0"/>
+          </a:solidFill>
+          <a:ln/>
+        </p:spPr>
+      </p:sp>
+      <p:sp>
+        <p:nvSpPr>
+          <p:cNvPr id="33" name="Text 31"/>
+          <p:cNvSpPr txBox="1"/>
+          <p:nvPr/>
+        </p:nvSpPr>
+        <p:spPr>
+          <a:xfrm>
+            <a:off x="5786963" y="3424977"/>
+            <a:ext cx="2905415" cy="331470"/>
+          </a:xfrm>
+          <a:prstGeom prst="rect">
+            <a:avLst/>
+          </a:prstGeom>
+          <a:noFill/>
+          <a:ln/>
+        </p:spPr>
+        <p:txBody>
+          <a:bodyPr wrap="none" lIns="0" tIns="0" rIns="0" bIns="0" rtlCol="0" anchor="t"/>
+          <a:lstStyle/>
+          <a:p>
+            <a:pPr algn="l" indent="0" marL="0">
+              <a:lnSpc>
+                <a:spcPts val="2610"/>
+              </a:lnSpc>
+              <a:buNone/>
+            </a:pPr>
+            <a:r>
+              <a:rPr lang="en-US" sz="1740" spc="-54" kern="0" dirty="0">
+                <a:solidFill>
+                  <a:srgbClr val="334155"/>
+                </a:solidFill>
+                <a:latin typeface="Malgun Gothic" pitchFamily="34" charset="0"/>
+                <a:ea typeface="Malgun Gothic" pitchFamily="34" charset="-122"/>
+                <a:cs typeface="Malgun Gothic" pitchFamily="34" charset="-120"/>
+              </a:rPr>
+              <a:t>Moderate (PD-L1 Only)</a:t>
+            </a:r>
+            <a:endParaRPr lang="en-US" sz="1740" dirty="0"/>
+          </a:p>
+        </p:txBody>
+      </p:sp>
+      <p:sp>
+        <p:nvSpPr>
+          <p:cNvPr id="34" name="Shape 32"/>
+          <p:cNvSpPr/>
+          <p:nvPr/>
+        </p:nvSpPr>
+        <p:spPr>
+          <a:xfrm>
+            <a:off x="8621420" y="3309762"/>
+            <a:ext cx="3022824" cy="9510"/>
+          </a:xfrm>
+          <a:prstGeom prst="rect">
+            <a:avLst/>
+          </a:prstGeom>
+          <a:solidFill>
+            <a:srgbClr val="D1D9E0"/>
+          </a:solidFill>
+          <a:ln/>
+        </p:spPr>
+      </p:sp>
+      <p:sp>
+        <p:nvSpPr>
+          <p:cNvPr id="35" name="Shape 33"/>
+          <p:cNvSpPr/>
+          <p:nvPr/>
+        </p:nvSpPr>
+        <p:spPr>
+          <a:xfrm>
+            <a:off x="11634826" y="3309762"/>
+            <a:ext cx="9510" cy="569580"/>
+          </a:xfrm>
+          <a:prstGeom prst="rect">
+            <a:avLst/>
+          </a:prstGeom>
+          <a:solidFill>
+            <a:srgbClr val="D1D9E0"/>
+          </a:solidFill>
+          <a:ln/>
+        </p:spPr>
+      </p:sp>
+      <p:sp>
+        <p:nvSpPr>
+          <p:cNvPr id="36" name="Shape 34"/>
+          <p:cNvSpPr/>
+          <p:nvPr/>
+        </p:nvSpPr>
+        <p:spPr>
+          <a:xfrm>
+            <a:off x="8621420" y="3869832"/>
+            <a:ext cx="3022824" cy="9510"/>
+          </a:xfrm>
+          <a:prstGeom prst="rect">
+            <a:avLst/>
+          </a:prstGeom>
+          <a:solidFill>
+            <a:srgbClr val="F1F5F9"/>
+          </a:solidFill>
+          <a:ln/>
+        </p:spPr>
+      </p:sp>
+      <p:sp>
+        <p:nvSpPr>
+          <p:cNvPr id="37" name="Shape 35"/>
+          <p:cNvSpPr/>
+          <p:nvPr/>
+        </p:nvSpPr>
+        <p:spPr>
+          <a:xfrm>
+            <a:off x="8621420" y="3309762"/>
+            <a:ext cx="9510" cy="569580"/>
+          </a:xfrm>
+          <a:prstGeom prst="rect">
+            <a:avLst/>
+          </a:prstGeom>
+          <a:solidFill>
+            <a:srgbClr val="D1D9E0"/>
+          </a:solidFill>
+          <a:ln/>
+        </p:spPr>
+      </p:sp>
+      <p:sp>
+        <p:nvSpPr>
+          <p:cNvPr id="38" name="Text 36"/>
+          <p:cNvSpPr txBox="1"/>
+          <p:nvPr/>
+        </p:nvSpPr>
+        <p:spPr>
+          <a:xfrm>
+            <a:off x="8745322" y="3424977"/>
+            <a:ext cx="2975092" cy="331470"/>
+          </a:xfrm>
+          <a:prstGeom prst="rect">
+            <a:avLst/>
+          </a:prstGeom>
+          <a:noFill/>
+          <a:ln/>
+        </p:spPr>
+        <p:txBody>
+          <a:bodyPr wrap="none" lIns="0" tIns="0" rIns="0" bIns="0" rtlCol="0" anchor="t"/>
+          <a:lstStyle/>
+          <a:p>
+            <a:pPr algn="l" indent="0" marL="0">
+              <a:lnSpc>
+                <a:spcPts val="2610"/>
+              </a:lnSpc>
+              <a:buNone/>
+            </a:pPr>
+            <a:r>
+              <a:rPr lang="en-US" sz="1740" b="1" spc="-54" kern="0" dirty="0">
+                <a:solidFill>
+                  <a:srgbClr val="15803D"/>
+                </a:solidFill>
+                <a:latin typeface="Malgun Gothic" pitchFamily="34" charset="0"/>
+                <a:ea typeface="Malgun Gothic" pitchFamily="34" charset="-122"/>
+                <a:cs typeface="Malgun Gothic" pitchFamily="34" charset="-120"/>
+              </a:rPr>
+              <a:t>Single-Cell TCR Precision</a:t>
+            </a:r>
+            <a:endParaRPr lang="en-US" sz="1740" dirty="0"/>
+          </a:p>
+        </p:txBody>
+      </p:sp>
+      <p:sp>
+        <p:nvSpPr>
+          <p:cNvPr id="39" name="Shape 37"/>
+          <p:cNvSpPr/>
+          <p:nvPr/>
+        </p:nvSpPr>
+        <p:spPr>
+          <a:xfrm>
+            <a:off x="8759586" y="3438327"/>
+            <a:ext cx="2679924" cy="304770"/>
+          </a:xfrm>
+          <a:prstGeom prst="roundRect">
+            <a:avLst>
+              <a:gd name="adj" fmla="val 12511"/>
+            </a:avLst>
+          </a:prstGeom>
+          <a:solidFill>
+            <a:srgbClr val="DCFCE7"/>
+          </a:solidFill>
+          <a:ln/>
+        </p:spPr>
+      </p:sp>
+      <p:sp>
+        <p:nvSpPr>
+          <p:cNvPr id="40" name="Shape 38"/>
+          <p:cNvSpPr/>
+          <p:nvPr/>
+        </p:nvSpPr>
+        <p:spPr>
+          <a:xfrm>
+            <a:off x="547726" y="3879342"/>
+            <a:ext cx="11096610" cy="569580"/>
+          </a:xfrm>
+          <a:prstGeom prst="rect">
+            <a:avLst/>
+          </a:prstGeom>
+          <a:solidFill>
+            <a:srgbClr val="F6F8FA"/>
+          </a:solidFill>
+          <a:ln/>
+        </p:spPr>
+      </p:sp>
+      <p:sp>
+        <p:nvSpPr>
+          <p:cNvPr id="41" name="Shape 39"/>
+          <p:cNvSpPr/>
+          <p:nvPr/>
+        </p:nvSpPr>
+        <p:spPr>
+          <a:xfrm>
+            <a:off x="547726" y="3879342"/>
+            <a:ext cx="11096610" cy="9510"/>
+          </a:xfrm>
+          <a:prstGeom prst="rect">
+            <a:avLst/>
+          </a:prstGeom>
+          <a:solidFill>
+            <a:srgbClr val="D1D9E0">
+              <a:alpha val="70000"/>
+            </a:srgbClr>
+          </a:solidFill>
+          <a:ln/>
+        </p:spPr>
+      </p:sp>
+      <p:sp>
+        <p:nvSpPr>
+          <p:cNvPr id="42" name="Shape 40"/>
+          <p:cNvSpPr/>
+          <p:nvPr/>
+        </p:nvSpPr>
+        <p:spPr>
+          <a:xfrm>
+            <a:off x="547726" y="3879342"/>
+            <a:ext cx="2410907" cy="9510"/>
+          </a:xfrm>
+          <a:prstGeom prst="rect">
+            <a:avLst/>
+          </a:prstGeom>
+          <a:solidFill>
+            <a:srgbClr val="D1D9E0"/>
+          </a:solidFill>
+          <a:ln/>
+        </p:spPr>
+      </p:sp>
+      <p:sp>
+        <p:nvSpPr>
+          <p:cNvPr id="43" name="Shape 41"/>
+          <p:cNvSpPr/>
+          <p:nvPr/>
+        </p:nvSpPr>
+        <p:spPr>
+          <a:xfrm>
+            <a:off x="2949031" y="3879342"/>
+            <a:ext cx="9510" cy="569580"/>
+          </a:xfrm>
+          <a:prstGeom prst="rect">
+            <a:avLst/>
+          </a:prstGeom>
+          <a:solidFill>
+            <a:srgbClr val="D1D9E0"/>
+          </a:solidFill>
+          <a:ln/>
+        </p:spPr>
+      </p:sp>
+      <p:sp>
+        <p:nvSpPr>
+          <p:cNvPr id="44" name="Shape 42"/>
+          <p:cNvSpPr/>
+          <p:nvPr/>
+        </p:nvSpPr>
+        <p:spPr>
+          <a:xfrm>
+            <a:off x="547726" y="4439412"/>
+            <a:ext cx="2410907" cy="9510"/>
+          </a:xfrm>
+          <a:prstGeom prst="rect">
+            <a:avLst/>
+          </a:prstGeom>
+          <a:solidFill>
+            <a:srgbClr val="F1F5F9"/>
+          </a:solidFill>
+          <a:ln/>
+        </p:spPr>
+      </p:sp>
+      <p:sp>
+        <p:nvSpPr>
+          <p:cNvPr id="45" name="Shape 43"/>
+          <p:cNvSpPr/>
+          <p:nvPr/>
+        </p:nvSpPr>
+        <p:spPr>
+          <a:xfrm>
+            <a:off x="547726" y="3879342"/>
+            <a:ext cx="9510" cy="569580"/>
+          </a:xfrm>
+          <a:prstGeom prst="rect">
+            <a:avLst/>
+          </a:prstGeom>
+          <a:solidFill>
+            <a:srgbClr val="D1D9E0"/>
+          </a:solidFill>
+          <a:ln/>
+        </p:spPr>
+      </p:sp>
+      <p:sp>
+        <p:nvSpPr>
+          <p:cNvPr id="46" name="Text 44"/>
+          <p:cNvSpPr txBox="1"/>
+          <p:nvPr/>
+        </p:nvSpPr>
+        <p:spPr>
+          <a:xfrm>
+            <a:off x="671535" y="3994556"/>
+            <a:ext cx="2314164" cy="331470"/>
+          </a:xfrm>
+          <a:prstGeom prst="rect">
+            <a:avLst/>
+          </a:prstGeom>
+          <a:noFill/>
+          <a:ln/>
+        </p:spPr>
+        <p:txBody>
+          <a:bodyPr wrap="none" lIns="0" tIns="0" rIns="0" bIns="0" rtlCol="0" anchor="t"/>
+          <a:lstStyle/>
+          <a:p>
+            <a:pPr algn="l" indent="0" marL="0">
+              <a:lnSpc>
+                <a:spcPts val="2610"/>
+              </a:lnSpc>
+              <a:buNone/>
+            </a:pPr>
+            <a:r>
+              <a:rPr lang="en-US" sz="1740" b="1" spc="-54" kern="0" dirty="0">
+                <a:solidFill>
+                  <a:srgbClr val="334155"/>
+                </a:solidFill>
+                <a:latin typeface="Malgun Gothic" pitchFamily="34" charset="0"/>
+                <a:ea typeface="Malgun Gothic" pitchFamily="34" charset="-122"/>
+                <a:cs typeface="Malgun Gothic" pitchFamily="34" charset="-120"/>
+              </a:rPr>
+              <a:t>Solid Tumor ORR</a:t>
+            </a:r>
+            <a:endParaRPr lang="en-US" sz="1740" dirty="0"/>
+          </a:p>
+        </p:txBody>
+      </p:sp>
+      <p:sp>
+        <p:nvSpPr>
+          <p:cNvPr id="47" name="Shape 45"/>
+          <p:cNvSpPr/>
+          <p:nvPr/>
+        </p:nvSpPr>
+        <p:spPr>
+          <a:xfrm>
+            <a:off x="2958541" y="3879342"/>
+            <a:ext cx="2704612" cy="9510"/>
+          </a:xfrm>
+          <a:prstGeom prst="rect">
+            <a:avLst/>
+          </a:prstGeom>
+          <a:solidFill>
+            <a:srgbClr val="D1D9E0"/>
+          </a:solidFill>
+          <a:ln/>
+        </p:spPr>
+      </p:sp>
+      <p:sp>
+        <p:nvSpPr>
+          <p:cNvPr id="48" name="Shape 46"/>
+          <p:cNvSpPr/>
+          <p:nvPr/>
+        </p:nvSpPr>
+        <p:spPr>
+          <a:xfrm>
+            <a:off x="5653644" y="3879342"/>
+            <a:ext cx="9510" cy="569580"/>
+          </a:xfrm>
+          <a:prstGeom prst="rect">
+            <a:avLst/>
+          </a:prstGeom>
+          <a:solidFill>
+            <a:srgbClr val="D1D9E0"/>
+          </a:solidFill>
+          <a:ln/>
+        </p:spPr>
+      </p:sp>
+      <p:sp>
+        <p:nvSpPr>
+          <p:cNvPr id="49" name="Shape 47"/>
+          <p:cNvSpPr/>
+          <p:nvPr/>
+        </p:nvSpPr>
+        <p:spPr>
+          <a:xfrm>
+            <a:off x="2958541" y="4439412"/>
+            <a:ext cx="2704612" cy="9510"/>
+          </a:xfrm>
+          <a:prstGeom prst="rect">
+            <a:avLst/>
+          </a:prstGeom>
+          <a:solidFill>
+            <a:srgbClr val="F1F5F9"/>
+          </a:solidFill>
+          <a:ln/>
+        </p:spPr>
+      </p:sp>
+      <p:sp>
+        <p:nvSpPr>
+          <p:cNvPr id="50" name="Shape 48"/>
+          <p:cNvSpPr/>
+          <p:nvPr/>
+        </p:nvSpPr>
+        <p:spPr>
+          <a:xfrm>
+            <a:off x="2958541" y="3879342"/>
+            <a:ext cx="9510" cy="569580"/>
+          </a:xfrm>
+          <a:prstGeom prst="rect">
+            <a:avLst/>
+          </a:prstGeom>
+          <a:solidFill>
+            <a:srgbClr val="D1D9E0"/>
+          </a:solidFill>
+          <a:ln/>
+        </p:spPr>
+      </p:sp>
+      <p:sp>
+        <p:nvSpPr>
+          <p:cNvPr id="51" name="Text 49"/>
+          <p:cNvSpPr txBox="1"/>
+          <p:nvPr/>
+        </p:nvSpPr>
+        <p:spPr>
+          <a:xfrm>
+            <a:off x="3082351" y="3994556"/>
+            <a:ext cx="2631460" cy="331470"/>
+          </a:xfrm>
+          <a:prstGeom prst="rect">
+            <a:avLst/>
+          </a:prstGeom>
+          <a:noFill/>
+          <a:ln/>
+        </p:spPr>
+        <p:txBody>
+          <a:bodyPr wrap="none" lIns="0" tIns="0" rIns="0" bIns="0" rtlCol="0" anchor="t"/>
+          <a:lstStyle/>
+          <a:p>
+            <a:pPr algn="l" indent="0" marL="0">
+              <a:lnSpc>
+                <a:spcPts val="2610"/>
+              </a:lnSpc>
+              <a:buNone/>
+            </a:pPr>
+            <a:r>
+              <a:rPr lang="en-US" sz="1740" spc="-54" kern="0" dirty="0">
+                <a:solidFill>
+                  <a:srgbClr val="334155"/>
+                </a:solidFill>
+                <a:latin typeface="Malgun Gothic" pitchFamily="34" charset="0"/>
+                <a:ea typeface="Malgun Gothic" pitchFamily="34" charset="-122"/>
+                <a:cs typeface="Malgun Gothic" pitchFamily="34" charset="-120"/>
+              </a:rPr>
+              <a:t>21.4%</a:t>
+            </a:r>
+            <a:endParaRPr lang="en-US" sz="1740" dirty="0"/>
+          </a:p>
+        </p:txBody>
+      </p:sp>
+      <p:sp>
+        <p:nvSpPr>
+          <p:cNvPr id="52" name="Shape 50"/>
+          <p:cNvSpPr/>
+          <p:nvPr/>
+        </p:nvSpPr>
+        <p:spPr>
+          <a:xfrm>
+            <a:off x="5663154" y="3879342"/>
+            <a:ext cx="2958267" cy="9510"/>
+          </a:xfrm>
+          <a:prstGeom prst="rect">
+            <a:avLst/>
+          </a:prstGeom>
+          <a:solidFill>
+            <a:srgbClr val="D1D9E0"/>
+          </a:solidFill>
+          <a:ln/>
+        </p:spPr>
+      </p:sp>
+      <p:sp>
+        <p:nvSpPr>
+          <p:cNvPr id="53" name="Shape 51"/>
+          <p:cNvSpPr/>
+          <p:nvPr/>
+        </p:nvSpPr>
+        <p:spPr>
+          <a:xfrm>
+            <a:off x="8611911" y="3879342"/>
+            <a:ext cx="9510" cy="569580"/>
+          </a:xfrm>
+          <a:prstGeom prst="rect">
+            <a:avLst/>
+          </a:prstGeom>
+          <a:solidFill>
+            <a:srgbClr val="D1D9E0"/>
+          </a:solidFill>
+          <a:ln/>
+        </p:spPr>
+      </p:sp>
+      <p:sp>
+        <p:nvSpPr>
+          <p:cNvPr id="54" name="Shape 52"/>
+          <p:cNvSpPr/>
+          <p:nvPr/>
+        </p:nvSpPr>
+        <p:spPr>
+          <a:xfrm>
+            <a:off x="5663154" y="4439412"/>
+            <a:ext cx="2958267" cy="9510"/>
+          </a:xfrm>
+          <a:prstGeom prst="rect">
+            <a:avLst/>
+          </a:prstGeom>
+          <a:solidFill>
+            <a:srgbClr val="F1F5F9"/>
+          </a:solidFill>
+          <a:ln/>
+        </p:spPr>
+      </p:sp>
+      <p:sp>
+        <p:nvSpPr>
+          <p:cNvPr id="55" name="Shape 53"/>
+          <p:cNvSpPr/>
+          <p:nvPr/>
+        </p:nvSpPr>
+        <p:spPr>
+          <a:xfrm>
+            <a:off x="5663154" y="3879342"/>
+            <a:ext cx="9510" cy="569580"/>
+          </a:xfrm>
+          <a:prstGeom prst="rect">
+            <a:avLst/>
+          </a:prstGeom>
+          <a:solidFill>
+            <a:srgbClr val="D1D9E0"/>
+          </a:solidFill>
+          <a:ln/>
+        </p:spPr>
+      </p:sp>
+      <p:sp>
+        <p:nvSpPr>
+          <p:cNvPr id="56" name="Text 54"/>
+          <p:cNvSpPr txBox="1"/>
+          <p:nvPr/>
+        </p:nvSpPr>
+        <p:spPr>
+          <a:xfrm>
+            <a:off x="5786963" y="3994556"/>
+            <a:ext cx="2905415" cy="331470"/>
+          </a:xfrm>
+          <a:prstGeom prst="rect">
+            <a:avLst/>
+          </a:prstGeom>
+          <a:noFill/>
+          <a:ln/>
+        </p:spPr>
+        <p:txBody>
+          <a:bodyPr wrap="none" lIns="0" tIns="0" rIns="0" bIns="0" rtlCol="0" anchor="t"/>
+          <a:lstStyle/>
+          <a:p>
+            <a:pPr algn="l" indent="0" marL="0">
+              <a:lnSpc>
+                <a:spcPts val="2610"/>
+              </a:lnSpc>
+              <a:buNone/>
+            </a:pPr>
+            <a:r>
+              <a:rPr lang="en-US" sz="1740" spc="-54" kern="0" dirty="0">
+                <a:solidFill>
+                  <a:srgbClr val="334155"/>
+                </a:solidFill>
+                <a:latin typeface="Malgun Gothic" pitchFamily="34" charset="0"/>
+                <a:ea typeface="Malgun Gothic" pitchFamily="34" charset="-122"/>
+                <a:cs typeface="Malgun Gothic" pitchFamily="34" charset="-120"/>
+              </a:rPr>
+              <a:t>38.2%</a:t>
+            </a:r>
+            <a:endParaRPr lang="en-US" sz="1740" dirty="0"/>
+          </a:p>
+        </p:txBody>
+      </p:sp>
+      <p:sp>
+        <p:nvSpPr>
+          <p:cNvPr id="57" name="Shape 55"/>
+          <p:cNvSpPr/>
+          <p:nvPr/>
+        </p:nvSpPr>
+        <p:spPr>
+          <a:xfrm>
+            <a:off x="8621420" y="3879342"/>
+            <a:ext cx="3022824" cy="9510"/>
+          </a:xfrm>
+          <a:prstGeom prst="rect">
+            <a:avLst/>
+          </a:prstGeom>
+          <a:solidFill>
+            <a:srgbClr val="D1D9E0"/>
+          </a:solidFill>
+          <a:ln/>
+        </p:spPr>
+      </p:sp>
+      <p:sp>
+        <p:nvSpPr>
+          <p:cNvPr id="58" name="Shape 56"/>
+          <p:cNvSpPr/>
+          <p:nvPr/>
+        </p:nvSpPr>
+        <p:spPr>
+          <a:xfrm>
+            <a:off x="11634826" y="3879342"/>
+            <a:ext cx="9510" cy="569580"/>
+          </a:xfrm>
+          <a:prstGeom prst="rect">
+            <a:avLst/>
+          </a:prstGeom>
+          <a:solidFill>
+            <a:srgbClr val="D1D9E0"/>
+          </a:solidFill>
+          <a:ln/>
+        </p:spPr>
+      </p:sp>
+      <p:sp>
+        <p:nvSpPr>
+          <p:cNvPr id="59" name="Shape 57"/>
+          <p:cNvSpPr/>
+          <p:nvPr/>
+        </p:nvSpPr>
+        <p:spPr>
+          <a:xfrm>
+            <a:off x="8621420" y="4439412"/>
+            <a:ext cx="3022824" cy="9510"/>
+          </a:xfrm>
+          <a:prstGeom prst="rect">
+            <a:avLst/>
+          </a:prstGeom>
+          <a:solidFill>
+            <a:srgbClr val="F1F5F9"/>
+          </a:solidFill>
+          <a:ln/>
+        </p:spPr>
+      </p:sp>
+      <p:sp>
+        <p:nvSpPr>
+          <p:cNvPr id="60" name="Shape 58"/>
+          <p:cNvSpPr/>
+          <p:nvPr/>
+        </p:nvSpPr>
+        <p:spPr>
+          <a:xfrm>
+            <a:off x="8621420" y="3879342"/>
+            <a:ext cx="9510" cy="569580"/>
+          </a:xfrm>
+          <a:prstGeom prst="rect">
+            <a:avLst/>
+          </a:prstGeom>
+          <a:solidFill>
+            <a:srgbClr val="D1D9E0"/>
+          </a:solidFill>
+          <a:ln/>
+        </p:spPr>
+      </p:sp>
+      <p:sp>
+        <p:nvSpPr>
+          <p:cNvPr id="61" name="Text 59"/>
+          <p:cNvSpPr txBox="1"/>
+          <p:nvPr/>
+        </p:nvSpPr>
+        <p:spPr>
+          <a:xfrm>
+            <a:off x="8745322" y="3994556"/>
+            <a:ext cx="2975092" cy="331470"/>
+          </a:xfrm>
+          <a:prstGeom prst="rect">
+            <a:avLst/>
+          </a:prstGeom>
+          <a:noFill/>
+          <a:ln/>
+        </p:spPr>
+        <p:txBody>
+          <a:bodyPr wrap="none" lIns="0" tIns="0" rIns="0" bIns="0" rtlCol="0" anchor="t"/>
+          <a:lstStyle/>
+          <a:p>
+            <a:pPr algn="l" indent="0" marL="0">
+              <a:lnSpc>
+                <a:spcPts val="2610"/>
+              </a:lnSpc>
+              <a:buNone/>
+            </a:pPr>
+            <a:r>
+              <a:rPr lang="en-US" sz="1740" b="1" spc="-54" kern="0" dirty="0">
+                <a:solidFill>
+                  <a:srgbClr val="15803D"/>
+                </a:solidFill>
+                <a:latin typeface="Malgun Gothic" pitchFamily="34" charset="0"/>
+                <a:ea typeface="Malgun Gothic" pitchFamily="34" charset="-122"/>
+                <a:cs typeface="Malgun Gothic" pitchFamily="34" charset="-120"/>
+              </a:rPr>
+              <a:t>84.2% (p &lt; 0.001)</a:t>
+            </a:r>
+            <a:endParaRPr lang="en-US" sz="1740" dirty="0"/>
+          </a:p>
+        </p:txBody>
+      </p:sp>
+      <p:sp>
+        <p:nvSpPr>
+          <p:cNvPr id="62" name="Shape 60"/>
+          <p:cNvSpPr/>
+          <p:nvPr/>
+        </p:nvSpPr>
+        <p:spPr>
+          <a:xfrm>
+            <a:off x="8759586" y="4007907"/>
+            <a:ext cx="2027225" cy="304770"/>
+          </a:xfrm>
+          <a:prstGeom prst="roundRect">
+            <a:avLst>
+              <a:gd name="adj" fmla="val 12511"/>
+            </a:avLst>
+          </a:prstGeom>
+          <a:solidFill>
+            <a:srgbClr val="DCFCE7"/>
+          </a:solidFill>
+          <a:ln/>
+        </p:spPr>
+      </p:sp>
+      <p:sp>
+        <p:nvSpPr>
+          <p:cNvPr id="63" name="Shape 61"/>
+          <p:cNvSpPr/>
+          <p:nvPr/>
+        </p:nvSpPr>
+        <p:spPr>
+          <a:xfrm>
+            <a:off x="547726" y="4448922"/>
+            <a:ext cx="11096610" cy="569580"/>
+          </a:xfrm>
+          <a:prstGeom prst="rect">
+            <a:avLst/>
+          </a:prstGeom>
+          <a:solidFill>
+            <a:srgbClr val="FFFFFF"/>
+          </a:solidFill>
+          <a:ln/>
+        </p:spPr>
+      </p:sp>
+      <p:sp>
+        <p:nvSpPr>
+          <p:cNvPr id="64" name="Shape 62"/>
+          <p:cNvSpPr/>
+          <p:nvPr/>
+        </p:nvSpPr>
+        <p:spPr>
+          <a:xfrm>
+            <a:off x="547726" y="4448922"/>
+            <a:ext cx="11096610" cy="9510"/>
+          </a:xfrm>
+          <a:prstGeom prst="rect">
+            <a:avLst/>
+          </a:prstGeom>
+          <a:solidFill>
+            <a:srgbClr val="D1D9E0">
+              <a:alpha val="70000"/>
+            </a:srgbClr>
+          </a:solidFill>
+          <a:ln/>
+        </p:spPr>
+      </p:sp>
+      <p:sp>
+        <p:nvSpPr>
+          <p:cNvPr id="65" name="Shape 63"/>
+          <p:cNvSpPr/>
+          <p:nvPr/>
+        </p:nvSpPr>
+        <p:spPr>
+          <a:xfrm>
+            <a:off x="547726" y="4448922"/>
+            <a:ext cx="2410907" cy="9510"/>
+          </a:xfrm>
+          <a:prstGeom prst="rect">
+            <a:avLst/>
+          </a:prstGeom>
+          <a:solidFill>
+            <a:srgbClr val="D1D9E0"/>
+          </a:solidFill>
+          <a:ln/>
+        </p:spPr>
+      </p:sp>
+      <p:sp>
+        <p:nvSpPr>
+          <p:cNvPr id="66" name="Shape 64"/>
+          <p:cNvSpPr/>
+          <p:nvPr/>
+        </p:nvSpPr>
+        <p:spPr>
+          <a:xfrm>
+            <a:off x="2949031" y="4448922"/>
+            <a:ext cx="9510" cy="569580"/>
+          </a:xfrm>
+          <a:prstGeom prst="rect">
+            <a:avLst/>
+          </a:prstGeom>
+          <a:solidFill>
+            <a:srgbClr val="D1D9E0"/>
+          </a:solidFill>
+          <a:ln/>
+        </p:spPr>
+      </p:sp>
+      <p:sp>
+        <p:nvSpPr>
+          <p:cNvPr id="67" name="Shape 65"/>
+          <p:cNvSpPr/>
+          <p:nvPr/>
+        </p:nvSpPr>
+        <p:spPr>
+          <a:xfrm>
+            <a:off x="547726" y="5008992"/>
+            <a:ext cx="2410907" cy="9510"/>
+          </a:xfrm>
+          <a:prstGeom prst="rect">
+            <a:avLst/>
+          </a:prstGeom>
+          <a:solidFill>
+            <a:srgbClr val="F1F5F9"/>
+          </a:solidFill>
+          <a:ln/>
+        </p:spPr>
+      </p:sp>
+      <p:sp>
+        <p:nvSpPr>
+          <p:cNvPr id="68" name="Shape 66"/>
+          <p:cNvSpPr/>
+          <p:nvPr/>
+        </p:nvSpPr>
+        <p:spPr>
+          <a:xfrm>
+            <a:off x="547726" y="4448922"/>
+            <a:ext cx="9510" cy="569580"/>
+          </a:xfrm>
+          <a:prstGeom prst="rect">
+            <a:avLst/>
+          </a:prstGeom>
+          <a:solidFill>
+            <a:srgbClr val="D1D9E0"/>
+          </a:solidFill>
+          <a:ln/>
+        </p:spPr>
+      </p:sp>
+      <p:sp>
+        <p:nvSpPr>
+          <p:cNvPr id="69" name="Text 67"/>
+          <p:cNvSpPr txBox="1"/>
+          <p:nvPr/>
+        </p:nvSpPr>
+        <p:spPr>
+          <a:xfrm>
+            <a:off x="671535" y="4564228"/>
+            <a:ext cx="2314164" cy="331470"/>
+          </a:xfrm>
+          <a:prstGeom prst="rect">
+            <a:avLst/>
+          </a:prstGeom>
+          <a:noFill/>
+          <a:ln/>
+        </p:spPr>
+        <p:txBody>
+          <a:bodyPr wrap="none" lIns="0" tIns="0" rIns="0" bIns="0" rtlCol="0" anchor="t"/>
+          <a:lstStyle/>
+          <a:p>
+            <a:pPr algn="l" indent="0" marL="0">
+              <a:lnSpc>
+                <a:spcPts val="2610"/>
+              </a:lnSpc>
+              <a:buNone/>
+            </a:pPr>
+            <a:r>
+              <a:rPr lang="en-US" sz="1740" b="1" spc="-54" kern="0" dirty="0">
+                <a:solidFill>
+                  <a:srgbClr val="334155"/>
+                </a:solidFill>
+                <a:latin typeface="Malgun Gothic" pitchFamily="34" charset="0"/>
+                <a:ea typeface="Malgun Gothic" pitchFamily="34" charset="-122"/>
+                <a:cs typeface="Malgun Gothic" pitchFamily="34" charset="-120"/>
+              </a:rPr>
+              <a:t>Grade 3/4 Toxicity</a:t>
+            </a:r>
+            <a:endParaRPr lang="en-US" sz="1740" dirty="0"/>
+          </a:p>
+        </p:txBody>
+      </p:sp>
+      <p:sp>
+        <p:nvSpPr>
+          <p:cNvPr id="70" name="Shape 68"/>
+          <p:cNvSpPr/>
+          <p:nvPr/>
+        </p:nvSpPr>
+        <p:spPr>
+          <a:xfrm>
+            <a:off x="2958541" y="4448922"/>
+            <a:ext cx="2704612" cy="9510"/>
+          </a:xfrm>
+          <a:prstGeom prst="rect">
+            <a:avLst/>
+          </a:prstGeom>
+          <a:solidFill>
+            <a:srgbClr val="D1D9E0"/>
+          </a:solidFill>
+          <a:ln/>
+        </p:spPr>
+      </p:sp>
+      <p:sp>
+        <p:nvSpPr>
+          <p:cNvPr id="71" name="Shape 69"/>
+          <p:cNvSpPr/>
+          <p:nvPr/>
+        </p:nvSpPr>
+        <p:spPr>
+          <a:xfrm>
+            <a:off x="5653644" y="4448922"/>
+            <a:ext cx="9510" cy="569580"/>
+          </a:xfrm>
+          <a:prstGeom prst="rect">
+            <a:avLst/>
+          </a:prstGeom>
+          <a:solidFill>
+            <a:srgbClr val="D1D9E0"/>
+          </a:solidFill>
+          <a:ln/>
+        </p:spPr>
+      </p:sp>
+      <p:sp>
+        <p:nvSpPr>
+          <p:cNvPr id="72" name="Shape 70"/>
+          <p:cNvSpPr/>
+          <p:nvPr/>
+        </p:nvSpPr>
+        <p:spPr>
+          <a:xfrm>
+            <a:off x="2958541" y="5008992"/>
+            <a:ext cx="2704612" cy="9510"/>
+          </a:xfrm>
+          <a:prstGeom prst="rect">
+            <a:avLst/>
+          </a:prstGeom>
+          <a:solidFill>
+            <a:srgbClr val="F1F5F9"/>
+          </a:solidFill>
+          <a:ln/>
+        </p:spPr>
+      </p:sp>
+      <p:sp>
+        <p:nvSpPr>
+          <p:cNvPr id="73" name="Shape 71"/>
+          <p:cNvSpPr/>
+          <p:nvPr/>
+        </p:nvSpPr>
+        <p:spPr>
+          <a:xfrm>
+            <a:off x="2958541" y="4448922"/>
+            <a:ext cx="9510" cy="569580"/>
+          </a:xfrm>
+          <a:prstGeom prst="rect">
+            <a:avLst/>
+          </a:prstGeom>
+          <a:solidFill>
+            <a:srgbClr val="D1D9E0"/>
+          </a:solidFill>
+          <a:ln/>
+        </p:spPr>
+      </p:sp>
+      <p:sp>
+        <p:nvSpPr>
+          <p:cNvPr id="74" name="Text 72"/>
+          <p:cNvSpPr txBox="1"/>
+          <p:nvPr/>
+        </p:nvSpPr>
+        <p:spPr>
+          <a:xfrm>
+            <a:off x="3082351" y="4564228"/>
+            <a:ext cx="2631460" cy="331470"/>
+          </a:xfrm>
+          <a:prstGeom prst="rect">
+            <a:avLst/>
+          </a:prstGeom>
+          <a:noFill/>
+          <a:ln/>
+        </p:spPr>
+        <p:txBody>
+          <a:bodyPr wrap="none" lIns="0" tIns="0" rIns="0" bIns="0" rtlCol="0" anchor="t"/>
+          <a:lstStyle/>
+          <a:p>
+            <a:pPr algn="l" indent="0" marL="0">
+              <a:lnSpc>
+                <a:spcPts val="2610"/>
+              </a:lnSpc>
+              <a:buNone/>
+            </a:pPr>
+            <a:r>
+              <a:rPr lang="en-US" sz="1740" b="1" spc="-54" kern="0" dirty="0">
+                <a:solidFill>
+                  <a:srgbClr val="B91C1C"/>
+                </a:solidFill>
+                <a:latin typeface="Malgun Gothic" pitchFamily="34" charset="0"/>
+                <a:ea typeface="Malgun Gothic" pitchFamily="34" charset="-122"/>
+                <a:cs typeface="Malgun Gothic" pitchFamily="34" charset="-120"/>
+              </a:rPr>
+              <a:t>46.8%</a:t>
+            </a:r>
+            <a:endParaRPr lang="en-US" sz="1740" dirty="0"/>
+          </a:p>
+        </p:txBody>
+      </p:sp>
+      <p:sp>
+        <p:nvSpPr>
+          <p:cNvPr id="75" name="Shape 73"/>
+          <p:cNvSpPr/>
+          <p:nvPr/>
+        </p:nvSpPr>
+        <p:spPr>
+          <a:xfrm>
+            <a:off x="3096707" y="4577486"/>
+            <a:ext cx="844540" cy="304770"/>
+          </a:xfrm>
+          <a:prstGeom prst="roundRect">
+            <a:avLst>
+              <a:gd name="adj" fmla="val 12511"/>
+            </a:avLst>
+          </a:prstGeom>
+          <a:solidFill>
+            <a:srgbClr val="FEE2E2"/>
+          </a:solidFill>
+          <a:ln/>
+        </p:spPr>
+      </p:sp>
+      <p:sp>
+        <p:nvSpPr>
+          <p:cNvPr id="76" name="Shape 74"/>
+          <p:cNvSpPr/>
+          <p:nvPr/>
+        </p:nvSpPr>
+        <p:spPr>
+          <a:xfrm>
+            <a:off x="5663154" y="4448922"/>
+            <a:ext cx="2958267" cy="9510"/>
+          </a:xfrm>
+          <a:prstGeom prst="rect">
+            <a:avLst/>
+          </a:prstGeom>
+          <a:solidFill>
+            <a:srgbClr val="D1D9E0"/>
+          </a:solidFill>
+          <a:ln/>
+        </p:spPr>
+      </p:sp>
+      <p:sp>
+        <p:nvSpPr>
+          <p:cNvPr id="77" name="Shape 75"/>
+          <p:cNvSpPr/>
+          <p:nvPr/>
+        </p:nvSpPr>
+        <p:spPr>
+          <a:xfrm>
+            <a:off x="8611911" y="4448922"/>
+            <a:ext cx="9510" cy="569580"/>
+          </a:xfrm>
+          <a:prstGeom prst="rect">
+            <a:avLst/>
+          </a:prstGeom>
+          <a:solidFill>
+            <a:srgbClr val="D1D9E0"/>
+          </a:solidFill>
+          <a:ln/>
+        </p:spPr>
+      </p:sp>
+      <p:sp>
+        <p:nvSpPr>
+          <p:cNvPr id="78" name="Shape 76"/>
+          <p:cNvSpPr/>
+          <p:nvPr/>
+        </p:nvSpPr>
+        <p:spPr>
+          <a:xfrm>
+            <a:off x="5663154" y="5008992"/>
+            <a:ext cx="2958267" cy="9510"/>
+          </a:xfrm>
+          <a:prstGeom prst="rect">
+            <a:avLst/>
+          </a:prstGeom>
+          <a:solidFill>
+            <a:srgbClr val="F1F5F9"/>
+          </a:solidFill>
+          <a:ln/>
+        </p:spPr>
+      </p:sp>
+      <p:sp>
+        <p:nvSpPr>
+          <p:cNvPr id="79" name="Shape 77"/>
+          <p:cNvSpPr/>
+          <p:nvPr/>
+        </p:nvSpPr>
+        <p:spPr>
+          <a:xfrm>
+            <a:off x="5663154" y="4448922"/>
+            <a:ext cx="9510" cy="569580"/>
+          </a:xfrm>
+          <a:prstGeom prst="rect">
+            <a:avLst/>
+          </a:prstGeom>
+          <a:solidFill>
+            <a:srgbClr val="D1D9E0"/>
+          </a:solidFill>
+          <a:ln/>
+        </p:spPr>
+      </p:sp>
+      <p:sp>
+        <p:nvSpPr>
+          <p:cNvPr id="80" name="Text 78"/>
+          <p:cNvSpPr txBox="1"/>
+          <p:nvPr/>
+        </p:nvSpPr>
+        <p:spPr>
+          <a:xfrm>
+            <a:off x="5786963" y="4564228"/>
+            <a:ext cx="2905415" cy="331470"/>
+          </a:xfrm>
+          <a:prstGeom prst="rect">
+            <a:avLst/>
+          </a:prstGeom>
+          <a:noFill/>
+          <a:ln/>
+        </p:spPr>
+        <p:txBody>
+          <a:bodyPr wrap="none" lIns="0" tIns="0" rIns="0" bIns="0" rtlCol="0" anchor="t"/>
+          <a:lstStyle/>
+          <a:p>
+            <a:pPr algn="l" indent="0" marL="0">
+              <a:lnSpc>
+                <a:spcPts val="2610"/>
+              </a:lnSpc>
+              <a:buNone/>
+            </a:pPr>
+            <a:r>
+              <a:rPr lang="en-US" sz="1740" spc="-54" kern="0" dirty="0">
+                <a:solidFill>
+                  <a:srgbClr val="334155"/>
+                </a:solidFill>
+                <a:latin typeface="Malgun Gothic" pitchFamily="34" charset="0"/>
+                <a:ea typeface="Malgun Gothic" pitchFamily="34" charset="-122"/>
+                <a:cs typeface="Malgun Gothic" pitchFamily="34" charset="-120"/>
+              </a:rPr>
+              <a:t>18.5%</a:t>
+            </a:r>
+            <a:endParaRPr lang="en-US" sz="1740" dirty="0"/>
+          </a:p>
+        </p:txBody>
+      </p:sp>
+      <p:sp>
+        <p:nvSpPr>
+          <p:cNvPr id="81" name="Shape 79"/>
+          <p:cNvSpPr/>
+          <p:nvPr/>
+        </p:nvSpPr>
+        <p:spPr>
+          <a:xfrm>
+            <a:off x="8621420" y="4448922"/>
+            <a:ext cx="3022824" cy="9510"/>
+          </a:xfrm>
+          <a:prstGeom prst="rect">
+            <a:avLst/>
+          </a:prstGeom>
+          <a:solidFill>
+            <a:srgbClr val="D1D9E0"/>
+          </a:solidFill>
+          <a:ln/>
+        </p:spPr>
+      </p:sp>
+      <p:sp>
+        <p:nvSpPr>
+          <p:cNvPr id="82" name="Shape 80"/>
+          <p:cNvSpPr/>
+          <p:nvPr/>
+        </p:nvSpPr>
+        <p:spPr>
+          <a:xfrm>
+            <a:off x="11634826" y="4448922"/>
+            <a:ext cx="9510" cy="569580"/>
+          </a:xfrm>
+          <a:prstGeom prst="rect">
+            <a:avLst/>
+          </a:prstGeom>
+          <a:solidFill>
+            <a:srgbClr val="D1D9E0"/>
+          </a:solidFill>
+          <a:ln/>
+        </p:spPr>
+      </p:sp>
+      <p:sp>
+        <p:nvSpPr>
+          <p:cNvPr id="83" name="Shape 81"/>
+          <p:cNvSpPr/>
+          <p:nvPr/>
+        </p:nvSpPr>
+        <p:spPr>
+          <a:xfrm>
+            <a:off x="8621420" y="5008992"/>
+            <a:ext cx="3022824" cy="9510"/>
+          </a:xfrm>
+          <a:prstGeom prst="rect">
+            <a:avLst/>
+          </a:prstGeom>
+          <a:solidFill>
+            <a:srgbClr val="F1F5F9"/>
+          </a:solidFill>
+          <a:ln/>
+        </p:spPr>
+      </p:sp>
+      <p:sp>
+        <p:nvSpPr>
+          <p:cNvPr id="84" name="Shape 82"/>
+          <p:cNvSpPr/>
+          <p:nvPr/>
+        </p:nvSpPr>
+        <p:spPr>
+          <a:xfrm>
+            <a:off x="8621420" y="4448922"/>
+            <a:ext cx="9510" cy="569580"/>
+          </a:xfrm>
+          <a:prstGeom prst="rect">
+            <a:avLst/>
+          </a:prstGeom>
+          <a:solidFill>
+            <a:srgbClr val="D1D9E0"/>
+          </a:solidFill>
+          <a:ln/>
+        </p:spPr>
+      </p:sp>
+      <p:sp>
+        <p:nvSpPr>
+          <p:cNvPr id="85" name="Text 83"/>
+          <p:cNvSpPr txBox="1"/>
+          <p:nvPr/>
+        </p:nvSpPr>
+        <p:spPr>
+          <a:xfrm>
+            <a:off x="8745322" y="4564228"/>
+            <a:ext cx="2975092" cy="331470"/>
+          </a:xfrm>
+          <a:prstGeom prst="rect">
+            <a:avLst/>
+          </a:prstGeom>
+          <a:noFill/>
+          <a:ln/>
+        </p:spPr>
+        <p:txBody>
+          <a:bodyPr wrap="none" lIns="0" tIns="0" rIns="0" bIns="0" rtlCol="0" anchor="t"/>
+          <a:lstStyle/>
+          <a:p>
+            <a:pPr algn="l" indent="0" marL="0">
+              <a:lnSpc>
+                <a:spcPts val="2610"/>
+              </a:lnSpc>
+              <a:buNone/>
+            </a:pPr>
+            <a:r>
+              <a:rPr lang="en-US" sz="1740" b="1" spc="-54" kern="0" dirty="0">
+                <a:solidFill>
+                  <a:srgbClr val="15803D"/>
+                </a:solidFill>
+                <a:latin typeface="Malgun Gothic" pitchFamily="34" charset="0"/>
+                <a:ea typeface="Malgun Gothic" pitchFamily="34" charset="-122"/>
+                <a:cs typeface="Malgun Gothic" pitchFamily="34" charset="-120"/>
+              </a:rPr>
+              <a:t>1.2% (Ultra-Safe)</a:t>
+            </a:r>
+            <a:endParaRPr lang="en-US" sz="1740" dirty="0"/>
+          </a:p>
+        </p:txBody>
+      </p:sp>
+      <p:sp>
+        <p:nvSpPr>
+          <p:cNvPr id="86" name="Shape 84"/>
+          <p:cNvSpPr/>
+          <p:nvPr/>
+        </p:nvSpPr>
+        <p:spPr>
+          <a:xfrm>
+            <a:off x="8759586" y="4577486"/>
+            <a:ext cx="1926184" cy="304770"/>
+          </a:xfrm>
+          <a:prstGeom prst="roundRect">
+            <a:avLst>
+              <a:gd name="adj" fmla="val 12511"/>
+            </a:avLst>
+          </a:prstGeom>
+          <a:solidFill>
+            <a:srgbClr val="DCFCE7"/>
+          </a:solidFill>
+          <a:ln/>
+        </p:spPr>
+      </p:sp>
+      <p:sp>
+        <p:nvSpPr>
+          <p:cNvPr id="87" name="Text 85"/>
+          <p:cNvSpPr txBox="1"/>
+          <p:nvPr/>
+        </p:nvSpPr>
+        <p:spPr>
+          <a:xfrm>
+            <a:off x="514350" y="6268303"/>
+            <a:ext cx="12034236" cy="164592"/>
+          </a:xfrm>
+          <a:prstGeom prst="rect">
+            <a:avLst/>
+          </a:prstGeom>
+          <a:noFill/>
+          <a:ln/>
+        </p:spPr>
+        <p:txBody>
+          <a:bodyPr wrap="none" lIns="0" tIns="0" rIns="0" bIns="0" rtlCol="0" anchor="t"/>
+          <a:lstStyle/>
+          <a:p>
+            <a:pPr algn="l" indent="0" marL="0">
+              <a:lnSpc>
+                <a:spcPts val="1296"/>
+              </a:lnSpc>
+              <a:buNone/>
+            </a:pPr>
+            <a:r>
+              <a:rPr lang="en-US" sz="864" spc="-54" kern="0" dirty="0">
+                <a:solidFill>
+                  <a:srgbClr val="475569"/>
+                </a:solidFill>
+                <a:latin typeface="Malgun Gothic" pitchFamily="34" charset="0"/>
+                <a:ea typeface="Malgun Gothic" pitchFamily="34" charset="-122"/>
+                <a:cs typeface="Malgun Gothic" pitchFamily="34" charset="-120"/>
+              </a:rPr>
+              <a:t>* Multi-center Phase II trial prospective cohort (N=520, 2024-2026)</a:t>
+            </a:r>
+            <a:endParaRPr lang="en-US" sz="864" dirty="0"/>
+          </a:p>
+        </p:txBody>
+      </p:sp>
     </p:spTree>
   </p:cSld>
   <p:clrMapOvr>
